--- a/static/ppts/G8_Sci_T4_Full_Revision.pptx
+++ b/static/ppts/G8_Sci_T4_Full_Revision.pptx
@@ -11,14 +11,12 @@
     <p:sldId id="259" r:id="rId5"/>
     <p:sldId id="260" r:id="rId6"/>
     <p:sldId id="261" r:id="rId7"/>
-    <p:sldId id="262" r:id="rId8"/>
-    <p:sldId id="263" r:id="rId9"/>
   </p:sldIdLst>
   <p:notesMasterIdLst>
-    <p:notesMasterId r:id="rId10"/>
+    <p:notesMasterId r:id="rId8"/>
   </p:notesMasterIdLst>
-  <p:sldSz cx="9144000" cy="5143500"/>
-  <p:notesSz cx="5143500" cy="9144000"/>
+  <p:sldSz cx="12192000" cy="6858000"/>
+  <p:notesSz cx="6858000" cy="12192000"/>
   <p:defaultTextStyle>
     <a:lvl1pPr marL="0" algn="l" defTabSz="914400" rtl="0" eaLnBrk="1" latinLnBrk="0" hangingPunct="1">
       <a:defRPr sz="1800" kern="1200">
@@ -991,182 +989,6 @@
 </p:notes>
 </file>
 
-<file path=ppt/notesSlides/notesSlide7.xml><?xml version="1.0" encoding="utf-8"?>
-<p:notes xmlns:a="http://schemas.openxmlformats.org/drawingml/2006/main" xmlns:r="http://schemas.openxmlformats.org/officeDocument/2006/relationships" xmlns:p="http://schemas.openxmlformats.org/presentationml/2006/main">
-  <p:cSld>
-    <p:spTree>
-      <p:nvGrpSpPr>
-        <p:cNvPr id="1" name=""/>
-        <p:cNvGrpSpPr/>
-        <p:nvPr/>
-      </p:nvGrpSpPr>
-      <p:grpSpPr>
-        <a:xfrm>
-          <a:off x="0" y="0"/>
-          <a:ext cx="0" cy="0"/>
-          <a:chOff x="0" y="0"/>
-          <a:chExt cx="0" cy="0"/>
-        </a:xfrm>
-      </p:grpSpPr>
-      <p:sp>
-        <p:nvSpPr>
-          <p:cNvPr id="2" name="Slide Image Placeholder 1"/>
-          <p:cNvSpPr>
-            <a:spLocks noGrp="1" noRot="1" noChangeAspect="1"/>
-          </p:cNvSpPr>
-          <p:nvPr>
-            <p:ph type="sldImg"/>
-          </p:nvPr>
-        </p:nvSpPr>
-        <p:spPr/>
-      </p:sp>
-      <p:sp>
-        <p:nvSpPr>
-          <p:cNvPr id="3" name="Notes Placeholder 2"/>
-          <p:cNvSpPr>
-            <a:spLocks noGrp="1"/>
-          </p:cNvSpPr>
-          <p:nvPr>
-            <p:ph type="body" idx="1"/>
-          </p:nvPr>
-        </p:nvSpPr>
-        <p:spPr/>
-        <p:txBody>
-          <a:bodyPr/>
-          <a:lstStyle/>
-          <a:p>
-            <a:r>
-              <a:rPr lang="en-US" dirty="0"/>
-              <a:t/>
-            </a:r>
-            <a:endParaRPr lang="en-US" dirty="0"/>
-          </a:p>
-        </p:txBody>
-      </p:sp>
-      <p:sp>
-        <p:nvSpPr>
-          <p:cNvPr id="4" name="Slide Number Placeholder 3"/>
-          <p:cNvSpPr>
-            <a:spLocks noGrp="1"/>
-          </p:cNvSpPr>
-          <p:nvPr>
-            <p:ph type="sldNum" sz="quarter" idx="10"/>
-          </p:nvPr>
-        </p:nvSpPr>
-        <p:spPr/>
-        <p:txBody>
-          <a:bodyPr/>
-          <a:lstStyle/>
-          <a:p>
-            <a:fld id="{F7021451-1387-4CA6-816F-3879F97B5CBC}" type="slidenum">
-              <a:rPr lang="en-US"/>
-              <a:t>7</a:t>
-            </a:fld>
-            <a:endParaRPr lang="en-US"/>
-          </a:p>
-        </p:txBody>
-      </p:sp>
-    </p:spTree>
-    <p:extLst>
-      <p:ext uri="{BB962C8B-B14F-4D97-AF65-F5344CB8AC3E}">
-        <p14:creationId xmlns:p14="http://schemas.microsoft.com/office/powerpoint/2010/main" val="1024086991"/>
-      </p:ext>
-    </p:extLst>
-  </p:cSld>
-  <p:clrMapOvr>
-    <a:masterClrMapping/>
-  </p:clrMapOvr>
-</p:notes>
-</file>
-
-<file path=ppt/notesSlides/notesSlide8.xml><?xml version="1.0" encoding="utf-8"?>
-<p:notes xmlns:a="http://schemas.openxmlformats.org/drawingml/2006/main" xmlns:r="http://schemas.openxmlformats.org/officeDocument/2006/relationships" xmlns:p="http://schemas.openxmlformats.org/presentationml/2006/main">
-  <p:cSld>
-    <p:spTree>
-      <p:nvGrpSpPr>
-        <p:cNvPr id="1" name=""/>
-        <p:cNvGrpSpPr/>
-        <p:nvPr/>
-      </p:nvGrpSpPr>
-      <p:grpSpPr>
-        <a:xfrm>
-          <a:off x="0" y="0"/>
-          <a:ext cx="0" cy="0"/>
-          <a:chOff x="0" y="0"/>
-          <a:chExt cx="0" cy="0"/>
-        </a:xfrm>
-      </p:grpSpPr>
-      <p:sp>
-        <p:nvSpPr>
-          <p:cNvPr id="2" name="Slide Image Placeholder 1"/>
-          <p:cNvSpPr>
-            <a:spLocks noGrp="1" noRot="1" noChangeAspect="1"/>
-          </p:cNvSpPr>
-          <p:nvPr>
-            <p:ph type="sldImg"/>
-          </p:nvPr>
-        </p:nvSpPr>
-        <p:spPr/>
-      </p:sp>
-      <p:sp>
-        <p:nvSpPr>
-          <p:cNvPr id="3" name="Notes Placeholder 2"/>
-          <p:cNvSpPr>
-            <a:spLocks noGrp="1"/>
-          </p:cNvSpPr>
-          <p:nvPr>
-            <p:ph type="body" idx="1"/>
-          </p:nvPr>
-        </p:nvSpPr>
-        <p:spPr/>
-        <p:txBody>
-          <a:bodyPr/>
-          <a:lstStyle/>
-          <a:p>
-            <a:r>
-              <a:rPr lang="en-US" dirty="0"/>
-              <a:t/>
-            </a:r>
-            <a:endParaRPr lang="en-US" dirty="0"/>
-          </a:p>
-        </p:txBody>
-      </p:sp>
-      <p:sp>
-        <p:nvSpPr>
-          <p:cNvPr id="4" name="Slide Number Placeholder 3"/>
-          <p:cNvSpPr>
-            <a:spLocks noGrp="1"/>
-          </p:cNvSpPr>
-          <p:nvPr>
-            <p:ph type="sldNum" sz="quarter" idx="10"/>
-          </p:nvPr>
-        </p:nvSpPr>
-        <p:spPr/>
-        <p:txBody>
-          <a:bodyPr/>
-          <a:lstStyle/>
-          <a:p>
-            <a:fld id="{F7021451-1387-4CA6-816F-3879F97B5CBC}" type="slidenum">
-              <a:rPr lang="en-US"/>
-              <a:t>8</a:t>
-            </a:fld>
-            <a:endParaRPr lang="en-US"/>
-          </a:p>
-        </p:txBody>
-      </p:sp>
-    </p:spTree>
-    <p:extLst>
-      <p:ext uri="{BB962C8B-B14F-4D97-AF65-F5344CB8AC3E}">
-        <p14:creationId xmlns:p14="http://schemas.microsoft.com/office/powerpoint/2010/main" val="1024086991"/>
-      </p:ext>
-    </p:extLst>
-  </p:cSld>
-  <p:clrMapOvr>
-    <a:masterClrMapping/>
-  </p:clrMapOvr>
-</p:notes>
-</file>
-
 <file path=ppt/slideLayouts/slideLayout1.xml><?xml version="1.0" encoding="utf-8"?>
 <p:sldLayout xmlns:a="http://schemas.openxmlformats.org/drawingml/2006/main" xmlns:r="http://schemas.openxmlformats.org/officeDocument/2006/relationships" xmlns:p="http://schemas.openxmlformats.org/presentationml/2006/main" preserve="1">
   <p:cSld name="DEFAULT">
@@ -1500,7 +1322,7 @@
         <p:spPr>
           <a:xfrm>
             <a:off x="0" y="0"/>
-            <a:ext cx="9144000" cy="5143500"/>
+            <a:ext cx="12188952" cy="6858000"/>
           </a:xfrm>
           <a:prstGeom prst="rect">
             <a:avLst/>
@@ -1519,76 +1341,98 @@
         </p:nvSpPr>
         <p:spPr>
           <a:xfrm>
-            <a:off x="0" y="4777740"/>
-            <a:ext cx="9144000" cy="365760"/>
-          </a:xfrm>
-          <a:prstGeom prst="rect">
-            <a:avLst/>
-          </a:prstGeom>
-          <a:solidFill>
-            <a:srgbClr val="E9C46A"/>
-          </a:solidFill>
-          <a:ln/>
-        </p:spPr>
-      </p:sp>
-      <p:sp>
-        <p:nvSpPr>
-          <p:cNvPr id="4" name="Text 2"/>
-          <p:cNvSpPr/>
-          <p:nvPr/>
-        </p:nvSpPr>
-        <p:spPr>
-          <a:xfrm>
-            <a:off x="731520" y="1097280"/>
-            <a:ext cx="7680960" cy="457200"/>
-          </a:xfrm>
-          <a:prstGeom prst="rect">
-            <a:avLst/>
-          </a:prstGeom>
-          <a:noFill/>
-          <a:ln/>
-        </p:spPr>
-        <p:txBody>
-          <a:bodyPr wrap="square" rtlCol="0" anchor="ctr"/>
-          <a:lstStyle/>
-          <a:p>
-            <a:pPr indent="0" marL="0">
-              <a:buNone/>
-            </a:pPr>
-            <a:r>
-              <a:rPr lang="en-US" sz="1400" b="1" spc="400" kern="0" dirty="0">
-                <a:solidFill>
-                  <a:srgbClr val="E9C46A"/>
-                </a:solidFill>
-                <a:latin typeface="Calibri" pitchFamily="34" charset="0"/>
-                <a:ea typeface="Calibri" pitchFamily="34" charset="-122"/>
-                <a:cs typeface="Calibri" pitchFamily="34" charset="-120"/>
+            <a:off x="0" y="0"/>
+            <a:ext cx="137160" cy="6858000"/>
+          </a:xfrm>
+          <a:prstGeom prst="rect">
+            <a:avLst/>
+          </a:prstGeom>
+          <a:solidFill>
+            <a:srgbClr val="1B2A4A"/>
+          </a:solidFill>
+          <a:ln/>
+        </p:spPr>
+      </p:sp>
+      <p:sp>
+        <p:nvSpPr>
+          <p:cNvPr id="4" name="Shape 2"/>
+          <p:cNvSpPr/>
+          <p:nvPr/>
+        </p:nvSpPr>
+        <p:spPr>
+          <a:xfrm>
+            <a:off x="731520" y="731520"/>
+            <a:ext cx="2011680" cy="411480"/>
+          </a:xfrm>
+          <a:prstGeom prst="roundRect">
+            <a:avLst>
+              <a:gd name="adj" fmla="val 33333"/>
+            </a:avLst>
+          </a:prstGeom>
+          <a:solidFill>
+            <a:srgbClr val="1B2A4A"/>
+          </a:solidFill>
+          <a:ln/>
+        </p:spPr>
+      </p:sp>
+      <p:sp>
+        <p:nvSpPr>
+          <p:cNvPr id="5" name="Text 3"/>
+          <p:cNvSpPr/>
+          <p:nvPr/>
+        </p:nvSpPr>
+        <p:spPr>
+          <a:xfrm>
+            <a:off x="731520" y="731520"/>
+            <a:ext cx="2011680" cy="411480"/>
+          </a:xfrm>
+          <a:prstGeom prst="rect">
+            <a:avLst/>
+          </a:prstGeom>
+          <a:noFill/>
+          <a:ln/>
+        </p:spPr>
+        <p:txBody>
+          <a:bodyPr wrap="square" rtlCol="0" anchor="ctr"/>
+          <a:lstStyle/>
+          <a:p>
+            <a:pPr algn="ctr" indent="0" marL="0">
+              <a:buNone/>
+            </a:pPr>
+            <a:r>
+              <a:rPr lang="en-US" sz="1100" b="1" dirty="0">
+                <a:solidFill>
+                  <a:srgbClr val="FFFFFF"/>
+                </a:solidFill>
+                <a:latin typeface="Arial" pitchFamily="34" charset="0"/>
+                <a:ea typeface="Arial" pitchFamily="34" charset="-122"/>
+                <a:cs typeface="Arial" pitchFamily="34" charset="-120"/>
               </a:rPr>
               <a:t>GRADE 8 SCIENCE</a:t>
             </a:r>
-            <a:endParaRPr lang="en-US" sz="1400" dirty="0"/>
-          </a:p>
-        </p:txBody>
-      </p:sp>
-      <p:sp>
-        <p:nvSpPr>
-          <p:cNvPr id="5" name="Text 3"/>
-          <p:cNvSpPr/>
-          <p:nvPr/>
-        </p:nvSpPr>
-        <p:spPr>
-          <a:xfrm>
-            <a:off x="731520" y="1645920"/>
-            <a:ext cx="7680960" cy="1463040"/>
-          </a:xfrm>
-          <a:prstGeom prst="rect">
-            <a:avLst/>
-          </a:prstGeom>
-          <a:noFill/>
-          <a:ln/>
-        </p:spPr>
-        <p:txBody>
-          <a:bodyPr wrap="square" rtlCol="0" anchor="t"/>
+            <a:endParaRPr lang="en-US" sz="1100" dirty="0"/>
+          </a:p>
+        </p:txBody>
+      </p:sp>
+      <p:sp>
+        <p:nvSpPr>
+          <p:cNvPr id="6" name="Text 4"/>
+          <p:cNvSpPr/>
+          <p:nvPr/>
+        </p:nvSpPr>
+        <p:spPr>
+          <a:xfrm>
+            <a:off x="731520" y="1828800"/>
+            <a:ext cx="10058400" cy="1371600"/>
+          </a:xfrm>
+          <a:prstGeom prst="rect">
+            <a:avLst/>
+          </a:prstGeom>
+          <a:noFill/>
+          <a:ln/>
+        </p:spPr>
+        <p:txBody>
+          <a:bodyPr wrap="square" rtlCol="0" anchor="ctr"/>
           <a:lstStyle/>
           <a:p>
             <a:pPr indent="0" marL="0">
@@ -1603,39 +1447,61 @@
                 <a:ea typeface="Georgia" pitchFamily="34" charset="-122"/>
                 <a:cs typeface="Georgia" pitchFamily="34" charset="-120"/>
               </a:rPr>
-              <a:t>Colonising Mars</a:t>
+              <a:t>📚 Mars — Full Revision</a:t>
             </a:r>
             <a:endParaRPr lang="en-US" sz="4000" dirty="0"/>
           </a:p>
+        </p:txBody>
+      </p:sp>
+      <p:sp>
+        <p:nvSpPr>
+          <p:cNvPr id="7" name="Text 5"/>
+          <p:cNvSpPr/>
+          <p:nvPr/>
+        </p:nvSpPr>
+        <p:spPr>
+          <a:xfrm>
+            <a:off x="731520" y="3200400"/>
+            <a:ext cx="7315200" cy="457200"/>
+          </a:xfrm>
+          <a:prstGeom prst="rect">
+            <a:avLst/>
+          </a:prstGeom>
+          <a:noFill/>
+          <a:ln/>
+        </p:spPr>
+        <p:txBody>
+          <a:bodyPr wrap="square" rtlCol="0" anchor="ctr"/>
+          <a:lstStyle/>
           <a:p>
             <a:pPr indent="0" marL="0">
               <a:buNone/>
             </a:pPr>
             <a:r>
-              <a:rPr lang="en-US" sz="4000" b="1" dirty="0">
-                <a:solidFill>
-                  <a:srgbClr val="FFFFFF"/>
-                </a:solidFill>
-                <a:latin typeface="Georgia" pitchFamily="34" charset="0"/>
-                <a:ea typeface="Georgia" pitchFamily="34" charset="-122"/>
-                <a:cs typeface="Georgia" pitchFamily="34" charset="-120"/>
-              </a:rPr>
-              <a:t>Full Revision</a:t>
-            </a:r>
-            <a:endParaRPr lang="en-US" sz="4000" dirty="0"/>
-          </a:p>
-        </p:txBody>
-      </p:sp>
-      <p:sp>
-        <p:nvSpPr>
-          <p:cNvPr id="6" name="Text 4"/>
-          <p:cNvSpPr/>
-          <p:nvPr/>
-        </p:nvSpPr>
-        <p:spPr>
-          <a:xfrm>
-            <a:off x="731520" y="3200400"/>
-            <a:ext cx="7680960" cy="548640"/>
+              <a:rPr lang="en-US" sz="1600" dirty="0">
+                <a:solidFill>
+                  <a:srgbClr val="E9C46A"/>
+                </a:solidFill>
+                <a:latin typeface="Arial" pitchFamily="34" charset="0"/>
+                <a:ea typeface="Arial" pitchFamily="34" charset="-122"/>
+                <a:cs typeface="Arial" pitchFamily="34" charset="-120"/>
+              </a:rPr>
+              <a:t>Term 4 · Interdisciplinary — Mars</a:t>
+            </a:r>
+            <a:endParaRPr lang="en-US" sz="1600" dirty="0"/>
+          </a:p>
+        </p:txBody>
+      </p:sp>
+      <p:sp>
+        <p:nvSpPr>
+          <p:cNvPr id="8" name="Text 6"/>
+          <p:cNvSpPr/>
+          <p:nvPr/>
+        </p:nvSpPr>
+        <p:spPr>
+          <a:xfrm>
+            <a:off x="731520" y="5669280"/>
+            <a:ext cx="2743200" cy="365760"/>
           </a:xfrm>
           <a:prstGeom prst="rect">
             <a:avLst/>
@@ -1651,56 +1517,56 @@
               <a:buNone/>
             </a:pPr>
             <a:r>
-              <a:rPr lang="en-US" sz="1600" i="1" dirty="0">
+              <a:rPr lang="en-US" sz="1400" b="1" dirty="0">
+                <a:solidFill>
+                  <a:srgbClr val="E9C46A"/>
+                </a:solidFill>
+                <a:latin typeface="Arial" pitchFamily="34" charset="0"/>
+                <a:ea typeface="Arial" pitchFamily="34" charset="-122"/>
+                <a:cs typeface="Arial" pitchFamily="34" charset="-120"/>
+              </a:rPr>
+              <a:t>MR ZOCCHI</a:t>
+            </a:r>
+            <a:endParaRPr lang="en-US" sz="1400" dirty="0"/>
+          </a:p>
+        </p:txBody>
+      </p:sp>
+      <p:sp>
+        <p:nvSpPr>
+          <p:cNvPr id="9" name="Text 7"/>
+          <p:cNvSpPr/>
+          <p:nvPr/>
+        </p:nvSpPr>
+        <p:spPr>
+          <a:xfrm>
+            <a:off x="731520" y="6035040"/>
+            <a:ext cx="2743200" cy="274320"/>
+          </a:xfrm>
+          <a:prstGeom prst="rect">
+            <a:avLst/>
+          </a:prstGeom>
+          <a:noFill/>
+          <a:ln/>
+        </p:spPr>
+        <p:txBody>
+          <a:bodyPr wrap="square" rtlCol="0" anchor="ctr"/>
+          <a:lstStyle/>
+          <a:p>
+            <a:pPr indent="0" marL="0">
+              <a:buNone/>
+            </a:pPr>
+            <a:r>
+              <a:rPr lang="en-US" sz="1100" dirty="0">
                 <a:solidFill>
                   <a:srgbClr val="9B9690"/>
                 </a:solidFill>
-                <a:latin typeface="Calibri" pitchFamily="34" charset="0"/>
-                <a:ea typeface="Calibri" pitchFamily="34" charset="-122"/>
-                <a:cs typeface="Calibri" pitchFamily="34" charset="-120"/>
-              </a:rPr>
-              <a:t>Planet, Challenges, Colony Design, Space Race, Ethics</a:t>
-            </a:r>
-            <a:endParaRPr lang="en-US" sz="1600" dirty="0"/>
-          </a:p>
-        </p:txBody>
-      </p:sp>
-      <p:sp>
-        <p:nvSpPr>
-          <p:cNvPr id="7" name="Text 5"/>
-          <p:cNvSpPr/>
-          <p:nvPr/>
-        </p:nvSpPr>
-        <p:spPr>
-          <a:xfrm>
-            <a:off x="731520" y="4206240"/>
-            <a:ext cx="3657600" cy="365760"/>
-          </a:xfrm>
-          <a:prstGeom prst="rect">
-            <a:avLst/>
-          </a:prstGeom>
-          <a:noFill/>
-          <a:ln/>
-        </p:spPr>
-        <p:txBody>
-          <a:bodyPr wrap="square" rtlCol="0" anchor="ctr"/>
-          <a:lstStyle/>
-          <a:p>
-            <a:pPr indent="0" marL="0">
-              <a:buNone/>
-            </a:pPr>
-            <a:r>
-              <a:rPr lang="en-US" sz="1200" dirty="0">
-                <a:solidFill>
-                  <a:srgbClr val="6B6660"/>
-                </a:solidFill>
-                <a:latin typeface="Calibri" pitchFamily="34" charset="0"/>
-                <a:ea typeface="Calibri" pitchFamily="34" charset="-122"/>
-                <a:cs typeface="Calibri" pitchFamily="34" charset="-120"/>
-              </a:rPr>
-              <a:t>Mr Zocchi</a:t>
-            </a:r>
-            <a:endParaRPr lang="en-US" sz="1200" dirty="0"/>
+                <a:latin typeface="Arial" pitchFamily="34" charset="0"/>
+                <a:ea typeface="Arial" pitchFamily="34" charset="-122"/>
+                <a:cs typeface="Arial" pitchFamily="34" charset="-120"/>
+              </a:rPr>
+              <a:t>mrzocchi.com</a:t>
+            </a:r>
+            <a:endParaRPr lang="en-US" sz="1100" dirty="0"/>
           </a:p>
         </p:txBody>
       </p:sp>
@@ -1738,13 +1604,13 @@
         <p:spPr>
           <a:xfrm>
             <a:off x="0" y="0"/>
-            <a:ext cx="9144000" cy="5143500"/>
-          </a:xfrm>
-          <a:prstGeom prst="rect">
-            <a:avLst/>
-          </a:prstGeom>
-          <a:solidFill>
-            <a:srgbClr val="111D35"/>
+            <a:ext cx="12188952" cy="1097280"/>
+          </a:xfrm>
+          <a:prstGeom prst="rect">
+            <a:avLst/>
+          </a:prstGeom>
+          <a:solidFill>
+            <a:srgbClr val="1B2A4A"/>
           </a:solidFill>
           <a:ln/>
         </p:spPr>
@@ -1757,8 +1623,8 @@
         </p:nvSpPr>
         <p:spPr>
           <a:xfrm>
-            <a:off x="731520" y="914400"/>
-            <a:ext cx="1828800" cy="1097280"/>
+            <a:off x="548640" y="182880"/>
+            <a:ext cx="9144000" cy="731520"/>
           </a:xfrm>
           <a:prstGeom prst="rect">
             <a:avLst/>
@@ -1774,19 +1640,17 @@
               <a:buNone/>
             </a:pPr>
             <a:r>
-              <a:rPr lang="en-US" sz="7200" b="1" dirty="0">
-                <a:solidFill>
-                  <a:srgbClr val="E9C46A">
-                    <a:alpha val="70000"/>
-                  </a:srgbClr>
+              <a:rPr lang="en-US" sz="2600" b="1" dirty="0">
+                <a:solidFill>
+                  <a:srgbClr val="FFFFFF"/>
                 </a:solidFill>
                 <a:latin typeface="Georgia" pitchFamily="34" charset="0"/>
                 <a:ea typeface="Georgia" pitchFamily="34" charset="-122"/>
                 <a:cs typeface="Georgia" pitchFamily="34" charset="-120"/>
               </a:rPr>
-              <a:t>01</a:t>
-            </a:r>
-            <a:endParaRPr lang="en-US" sz="7200" dirty="0"/>
+              <a:t>🎯 Learning Objectives</a:t>
+            </a:r>
+            <a:endParaRPr lang="en-US" sz="2600" dirty="0"/>
           </a:p>
         </p:txBody>
       </p:sp>
@@ -1798,8 +1662,133 @@
         </p:nvSpPr>
         <p:spPr>
           <a:xfrm>
+            <a:off x="731520" y="1371600"/>
+            <a:ext cx="9144000" cy="365760"/>
+          </a:xfrm>
+          <a:prstGeom prst="rect">
+            <a:avLst/>
+          </a:prstGeom>
+          <a:noFill/>
+          <a:ln/>
+        </p:spPr>
+        <p:txBody>
+          <a:bodyPr wrap="square" rtlCol="0" anchor="ctr"/>
+          <a:lstStyle/>
+          <a:p>
+            <a:pPr indent="0" marL="0">
+              <a:buNone/>
+            </a:pPr>
+            <a:r>
+              <a:rPr lang="en-US" sz="1400" i="1" dirty="0">
+                <a:solidFill>
+                  <a:srgbClr val="6B6660"/>
+                </a:solidFill>
+                <a:latin typeface="Arial" pitchFamily="34" charset="0"/>
+                <a:ea typeface="Arial" pitchFamily="34" charset="-122"/>
+                <a:cs typeface="Arial" pitchFamily="34" charset="-120"/>
+              </a:rPr>
+              <a:t>By the end of this lesson, you will be able to:</a:t>
+            </a:r>
+            <a:endParaRPr lang="en-US" sz="1400" dirty="0"/>
+          </a:p>
+        </p:txBody>
+      </p:sp>
+      <p:sp>
+        <p:nvSpPr>
+          <p:cNvPr id="5" name="Shape 3"/>
+          <p:cNvSpPr/>
+          <p:nvPr/>
+        </p:nvSpPr>
+        <p:spPr>
+          <a:xfrm>
             <a:off x="731520" y="2011680"/>
-            <a:ext cx="7680960" cy="1097280"/>
+            <a:ext cx="10515600" cy="594360"/>
+          </a:xfrm>
+          <a:prstGeom prst="roundRect">
+            <a:avLst>
+              <a:gd name="adj" fmla="val 15385"/>
+            </a:avLst>
+          </a:prstGeom>
+          <a:solidFill>
+            <a:srgbClr val="F3F1EE"/>
+          </a:solidFill>
+          <a:ln w="12700">
+            <a:solidFill>
+              <a:srgbClr val="E5E2DC"/>
+            </a:solidFill>
+            <a:prstDash val="solid"/>
+          </a:ln>
+        </p:spPr>
+      </p:sp>
+      <p:sp>
+        <p:nvSpPr>
+          <p:cNvPr id="6" name="Shape 4"/>
+          <p:cNvSpPr/>
+          <p:nvPr/>
+        </p:nvSpPr>
+        <p:spPr>
+          <a:xfrm>
+            <a:off x="914400" y="2121408"/>
+            <a:ext cx="365760" cy="365760"/>
+          </a:xfrm>
+          <a:prstGeom prst="ellipse">
+            <a:avLst/>
+          </a:prstGeom>
+          <a:solidFill>
+            <a:srgbClr val="1B2A4A"/>
+          </a:solidFill>
+          <a:ln/>
+        </p:spPr>
+      </p:sp>
+      <p:sp>
+        <p:nvSpPr>
+          <p:cNvPr id="7" name="Text 5"/>
+          <p:cNvSpPr/>
+          <p:nvPr/>
+        </p:nvSpPr>
+        <p:spPr>
+          <a:xfrm>
+            <a:off x="914400" y="2121408"/>
+            <a:ext cx="365760" cy="365760"/>
+          </a:xfrm>
+          <a:prstGeom prst="rect">
+            <a:avLst/>
+          </a:prstGeom>
+          <a:noFill/>
+          <a:ln/>
+        </p:spPr>
+        <p:txBody>
+          <a:bodyPr wrap="square" rtlCol="0" anchor="ctr"/>
+          <a:lstStyle/>
+          <a:p>
+            <a:pPr algn="ctr" indent="0" marL="0">
+              <a:buNone/>
+            </a:pPr>
+            <a:r>
+              <a:rPr lang="en-US" sz="1200" b="1" dirty="0">
+                <a:solidFill>
+                  <a:srgbClr val="FFFFFF"/>
+                </a:solidFill>
+                <a:latin typeface="Arial" pitchFamily="34" charset="0"/>
+                <a:ea typeface="Arial" pitchFamily="34" charset="-122"/>
+                <a:cs typeface="Arial" pitchFamily="34" charset="-120"/>
+              </a:rPr>
+              <a:t>1</a:t>
+            </a:r>
+            <a:endParaRPr lang="en-US" sz="1200" dirty="0"/>
+          </a:p>
+        </p:txBody>
+      </p:sp>
+      <p:sp>
+        <p:nvSpPr>
+          <p:cNvPr id="8" name="Text 6"/>
+          <p:cNvSpPr/>
+          <p:nvPr/>
+        </p:nvSpPr>
+        <p:spPr>
+          <a:xfrm>
+            <a:off x="1463040" y="2057400"/>
+            <a:ext cx="9601200" cy="502920"/>
           </a:xfrm>
           <a:prstGeom prst="rect">
             <a:avLst/>
@@ -1815,39 +1804,78 @@
               <a:buNone/>
             </a:pPr>
             <a:r>
-              <a:rPr lang="en-US" sz="3200" b="1" dirty="0">
-                <a:solidFill>
-                  <a:srgbClr val="FFFFFF"/>
-                </a:solidFill>
-                <a:latin typeface="Georgia" pitchFamily="34" charset="0"/>
-                <a:ea typeface="Georgia" pitchFamily="34" charset="-122"/>
-                <a:cs typeface="Georgia" pitchFamily="34" charset="-120"/>
-              </a:rPr>
-              <a:t>Mars the Planet</a:t>
-            </a:r>
-            <a:endParaRPr lang="en-US" sz="3200" dirty="0"/>
-          </a:p>
-        </p:txBody>
-      </p:sp>
-      <p:sp>
-        <p:nvSpPr>
-          <p:cNvPr id="5" name="Shape 3"/>
-          <p:cNvSpPr/>
-          <p:nvPr/>
-        </p:nvSpPr>
-        <p:spPr>
-          <a:xfrm>
-            <a:off x="731520" y="3200400"/>
-            <a:ext cx="1828800" cy="54864"/>
-          </a:xfrm>
-          <a:prstGeom prst="rect">
-            <a:avLst/>
-          </a:prstGeom>
-          <a:solidFill>
-            <a:srgbClr val="E9C46A"/>
-          </a:solidFill>
-          <a:ln/>
-        </p:spPr>
+              <a:rPr lang="en-US" sz="1500" dirty="0">
+                <a:solidFill>
+                  <a:srgbClr val="3D3A36"/>
+                </a:solidFill>
+                <a:latin typeface="Arial" pitchFamily="34" charset="0"/>
+                <a:ea typeface="Arial" pitchFamily="34" charset="-122"/>
+                <a:cs typeface="Arial" pitchFamily="34" charset="-120"/>
+              </a:rPr>
+              <a:t>Review all Mars and space exploration concepts</a:t>
+            </a:r>
+            <a:endParaRPr lang="en-US" sz="1500" dirty="0"/>
+          </a:p>
+        </p:txBody>
+      </p:sp>
+      <p:sp>
+        <p:nvSpPr>
+          <p:cNvPr id="9" name="Shape 7"/>
+          <p:cNvSpPr/>
+          <p:nvPr/>
+        </p:nvSpPr>
+        <p:spPr>
+          <a:xfrm>
+            <a:off x="0" y="6492240"/>
+            <a:ext cx="12188952" cy="365760"/>
+          </a:xfrm>
+          <a:prstGeom prst="rect">
+            <a:avLst/>
+          </a:prstGeom>
+          <a:solidFill>
+            <a:srgbClr val="1B2A4A"/>
+          </a:solidFill>
+          <a:ln/>
+        </p:spPr>
+      </p:sp>
+      <p:sp>
+        <p:nvSpPr>
+          <p:cNvPr id="10" name="Text 8"/>
+          <p:cNvSpPr/>
+          <p:nvPr/>
+        </p:nvSpPr>
+        <p:spPr>
+          <a:xfrm>
+            <a:off x="10058400" y="6537960"/>
+            <a:ext cx="1828800" cy="274320"/>
+          </a:xfrm>
+          <a:prstGeom prst="rect">
+            <a:avLst/>
+          </a:prstGeom>
+          <a:noFill/>
+          <a:ln/>
+        </p:spPr>
+        <p:txBody>
+          <a:bodyPr wrap="square" rtlCol="0" anchor="ctr"/>
+          <a:lstStyle/>
+          <a:p>
+            <a:pPr algn="r" indent="0" marL="0">
+              <a:buNone/>
+            </a:pPr>
+            <a:r>
+              <a:rPr lang="en-US" sz="900" dirty="0">
+                <a:solidFill>
+                  <a:srgbClr val="E9C46A"/>
+                </a:solidFill>
+                <a:latin typeface="Arial" pitchFamily="34" charset="0"/>
+                <a:ea typeface="Arial" pitchFamily="34" charset="-122"/>
+                <a:cs typeface="Arial" pitchFamily="34" charset="-120"/>
+              </a:rPr>
+              <a:t>mrzocchi.com</a:t>
+            </a:r>
+            <a:endParaRPr lang="en-US" sz="900" dirty="0"/>
+          </a:p>
+        </p:txBody>
       </p:sp>
     </p:spTree>
   </p:cSld>
@@ -1860,13 +1888,6 @@
 <file path=ppt/slides/slide3.xml><?xml version="1.0" encoding="utf-8"?>
 <p:sld xmlns:a="http://schemas.openxmlformats.org/drawingml/2006/main" xmlns:r="http://schemas.openxmlformats.org/officeDocument/2006/relationships" xmlns:p="http://schemas.openxmlformats.org/presentationml/2006/main">
   <p:cSld name="Slide 3">
-    <p:bg>
-      <p:bgPr>
-        <a:solidFill>
-          <a:srgbClr val="FAF8F5"/>
-        </a:solidFill>
-      </p:bgPr>
-    </p:bg>
     <p:spTree>
       <p:nvGrpSpPr>
         <p:cNvPr id="1" name=""/>
@@ -1890,179 +1911,481 @@
         <p:spPr>
           <a:xfrm>
             <a:off x="0" y="0"/>
-            <a:ext cx="9144000" cy="822960"/>
-          </a:xfrm>
-          <a:prstGeom prst="rect">
-            <a:avLst/>
-          </a:prstGeom>
-          <a:solidFill>
-            <a:srgbClr val="FFFFFF"/>
-          </a:solidFill>
-          <a:ln/>
-        </p:spPr>
-      </p:sp>
-      <p:sp>
-        <p:nvSpPr>
-          <p:cNvPr id="3" name="Shape 1"/>
-          <p:cNvSpPr/>
-          <p:nvPr/>
-        </p:nvSpPr>
-        <p:spPr>
-          <a:xfrm>
-            <a:off x="0" y="795528"/>
-            <a:ext cx="9144000" cy="27432"/>
-          </a:xfrm>
-          <a:prstGeom prst="rect">
-            <a:avLst/>
-          </a:prstGeom>
-          <a:solidFill>
-            <a:srgbClr val="E9C46A"/>
-          </a:solidFill>
-          <a:ln/>
-        </p:spPr>
-      </p:sp>
-      <p:sp>
-        <p:nvSpPr>
-          <p:cNvPr id="4" name="Text 2"/>
-          <p:cNvSpPr/>
-          <p:nvPr/>
-        </p:nvSpPr>
-        <p:spPr>
-          <a:xfrm>
-            <a:off x="640080" y="91440"/>
-            <a:ext cx="7863840" cy="640080"/>
-          </a:xfrm>
-          <a:prstGeom prst="rect">
-            <a:avLst/>
-          </a:prstGeom>
-          <a:noFill/>
-          <a:ln/>
-        </p:spPr>
-        <p:txBody>
-          <a:bodyPr wrap="square" lIns="0" tIns="0" rIns="0" bIns="0" rtlCol="0" anchor="ctr"/>
+            <a:ext cx="12188952" cy="1097280"/>
+          </a:xfrm>
+          <a:prstGeom prst="rect">
+            <a:avLst/>
+          </a:prstGeom>
+          <a:solidFill>
+            <a:srgbClr val="1B2A4A"/>
+          </a:solidFill>
+          <a:ln/>
+        </p:spPr>
+      </p:sp>
+      <p:sp>
+        <p:nvSpPr>
+          <p:cNvPr id="3" name="Text 1"/>
+          <p:cNvSpPr/>
+          <p:nvPr/>
+        </p:nvSpPr>
+        <p:spPr>
+          <a:xfrm>
+            <a:off x="548640" y="182880"/>
+            <a:ext cx="10972800" cy="731520"/>
+          </a:xfrm>
+          <a:prstGeom prst="rect">
+            <a:avLst/>
+          </a:prstGeom>
+          <a:noFill/>
+          <a:ln/>
+        </p:spPr>
+        <p:txBody>
+          <a:bodyPr wrap="square" rtlCol="0" anchor="ctr"/>
           <a:lstStyle/>
           <a:p>
             <a:pPr indent="0" marL="0">
               <a:buNone/>
             </a:pPr>
             <a:r>
-              <a:rPr lang="en-US" sz="2200" b="1" dirty="0">
-                <a:solidFill>
-                  <a:srgbClr val="1B2A4A"/>
+              <a:rPr lang="en-US" sz="2600" b="1" dirty="0">
+                <a:solidFill>
+                  <a:srgbClr val="FFFFFF"/>
                 </a:solidFill>
                 <a:latin typeface="Georgia" pitchFamily="34" charset="0"/>
                 <a:ea typeface="Georgia" pitchFamily="34" charset="-122"/>
                 <a:cs typeface="Georgia" pitchFamily="34" charset="-120"/>
               </a:rPr>
-              <a:t>Mars Recap</a:t>
-            </a:r>
-            <a:endParaRPr lang="en-US" sz="2200" dirty="0"/>
-          </a:p>
-        </p:txBody>
-      </p:sp>
-      <p:sp>
-        <p:nvSpPr>
-          <p:cNvPr id="5" name="Text 3"/>
-          <p:cNvSpPr/>
-          <p:nvPr/>
-        </p:nvSpPr>
-        <p:spPr>
-          <a:xfrm>
-            <a:off x="640080" y="1005840"/>
-            <a:ext cx="7863840" cy="2926080"/>
-          </a:xfrm>
-          <a:prstGeom prst="rect">
-            <a:avLst/>
-          </a:prstGeom>
-          <a:noFill/>
-          <a:ln/>
-        </p:spPr>
-        <p:txBody>
-          <a:bodyPr wrap="square" rtlCol="0" anchor="ctr"/>
-          <a:lstStyle/>
-          <a:p>
-            <a:pPr marL="342900" indent="-342900">
-              <a:spcAft>
-                <a:spcPts val="800"/>
-              </a:spcAft>
-              <a:buSzPct val="100000"/>
-              <a:buChar char="•"/>
-            </a:pPr>
-            <a:r>
-              <a:rPr lang="en-US" sz="1600" dirty="0">
+              <a:t>Unit Overview</a:t>
+            </a:r>
+            <a:endParaRPr lang="en-US" sz="2600" dirty="0"/>
+          </a:p>
+        </p:txBody>
+      </p:sp>
+      <p:sp>
+        <p:nvSpPr>
+          <p:cNvPr id="4" name="Text 2"/>
+          <p:cNvSpPr/>
+          <p:nvPr/>
+        </p:nvSpPr>
+        <p:spPr>
+          <a:xfrm>
+            <a:off x="731520" y="1325880"/>
+            <a:ext cx="10515600" cy="457200"/>
+          </a:xfrm>
+          <a:prstGeom prst="rect">
+            <a:avLst/>
+          </a:prstGeom>
+          <a:noFill/>
+          <a:ln/>
+        </p:spPr>
+        <p:txBody>
+          <a:bodyPr wrap="square" rtlCol="0" anchor="ctr"/>
+          <a:lstStyle/>
+          <a:p>
+            <a:pPr indent="0" marL="0">
+              <a:buNone/>
+            </a:pPr>
+            <a:r>
+              <a:rPr lang="en-US" sz="1400" i="1" dirty="0">
+                <a:solidFill>
+                  <a:srgbClr val="6B6660"/>
+                </a:solidFill>
+                <a:latin typeface="Arial" pitchFamily="34" charset="0"/>
+                <a:ea typeface="Arial" pitchFamily="34" charset="-122"/>
+                <a:cs typeface="Arial" pitchFamily="34" charset="-120"/>
+              </a:rPr>
+              <a:t>Key comparison: Mars vs Earth environments.</a:t>
+            </a:r>
+            <a:endParaRPr lang="en-US" sz="1400" dirty="0"/>
+          </a:p>
+        </p:txBody>
+      </p:sp>
+      <p:sp>
+        <p:nvSpPr>
+          <p:cNvPr id="5" name="Shape 3"/>
+          <p:cNvSpPr/>
+          <p:nvPr/>
+        </p:nvSpPr>
+        <p:spPr>
+          <a:xfrm>
+            <a:off x="731520" y="1920240"/>
+            <a:ext cx="10515600" cy="640080"/>
+          </a:xfrm>
+          <a:prstGeom prst="roundRect">
+            <a:avLst>
+              <a:gd name="adj" fmla="val 14286"/>
+            </a:avLst>
+          </a:prstGeom>
+          <a:solidFill>
+            <a:srgbClr val="FFFFFF"/>
+          </a:solidFill>
+          <a:ln w="6350">
+            <a:solidFill>
+              <a:srgbClr val="E5E2DC"/>
+            </a:solidFill>
+            <a:prstDash val="solid"/>
+          </a:ln>
+        </p:spPr>
+      </p:sp>
+      <p:sp>
+        <p:nvSpPr>
+          <p:cNvPr id="6" name="Text 4"/>
+          <p:cNvSpPr/>
+          <p:nvPr/>
+        </p:nvSpPr>
+        <p:spPr>
+          <a:xfrm>
+            <a:off x="1005840" y="1965960"/>
+            <a:ext cx="10058400" cy="548640"/>
+          </a:xfrm>
+          <a:prstGeom prst="rect">
+            <a:avLst/>
+          </a:prstGeom>
+          <a:noFill/>
+          <a:ln/>
+        </p:spPr>
+        <p:txBody>
+          <a:bodyPr wrap="square" rtlCol="0" anchor="ctr"/>
+          <a:lstStyle/>
+          <a:p>
+            <a:pPr indent="0" marL="0">
+              <a:buNone/>
+            </a:pPr>
+            <a:r>
+              <a:rPr lang="en-US" sz="1500" dirty="0">
                 <a:solidFill>
                   <a:srgbClr val="3D3A36"/>
                 </a:solidFill>
-                <a:latin typeface="Calibri" pitchFamily="34" charset="0"/>
-                <a:ea typeface="Calibri" pitchFamily="34" charset="-122"/>
-                <a:cs typeface="Calibri" pitchFamily="34" charset="-120"/>
-              </a:rPr>
-              <a:t>228M km from Sun. 38% gravity. -60°C average. 95% CO2 atmosphere.</a:t>
-            </a:r>
-            <a:endParaRPr lang="en-US" sz="1600" dirty="0"/>
-          </a:p>
-          <a:p>
-            <a:pPr marL="342900" indent="-342900">
-              <a:spcAft>
-                <a:spcPts val="800"/>
-              </a:spcAft>
-              <a:buSzPct val="100000"/>
-              <a:buChar char="•"/>
-            </a:pPr>
-            <a:r>
-              <a:rPr lang="en-US" sz="1600" dirty="0">
+                <a:latin typeface="Arial" pitchFamily="34" charset="0"/>
+                <a:ea typeface="Arial" pitchFamily="34" charset="-122"/>
+                <a:cs typeface="Arial" pitchFamily="34" charset="-120"/>
+              </a:rPr>
+              <a:t>▸ Mars Facts — thin CO₂ atmosphere, −60°C, half Earth's size</a:t>
+            </a:r>
+            <a:endParaRPr lang="en-US" sz="1500" dirty="0"/>
+          </a:p>
+        </p:txBody>
+      </p:sp>
+      <p:sp>
+        <p:nvSpPr>
+          <p:cNvPr id="7" name="Shape 5"/>
+          <p:cNvSpPr/>
+          <p:nvPr/>
+        </p:nvSpPr>
+        <p:spPr>
+          <a:xfrm>
+            <a:off x="731520" y="2697480"/>
+            <a:ext cx="10515600" cy="640080"/>
+          </a:xfrm>
+          <a:prstGeom prst="roundRect">
+            <a:avLst>
+              <a:gd name="adj" fmla="val 14286"/>
+            </a:avLst>
+          </a:prstGeom>
+          <a:solidFill>
+            <a:srgbClr val="F8F6F3"/>
+          </a:solidFill>
+          <a:ln w="6350">
+            <a:solidFill>
+              <a:srgbClr val="E5E2DC"/>
+            </a:solidFill>
+            <a:prstDash val="solid"/>
+          </a:ln>
+        </p:spPr>
+      </p:sp>
+      <p:sp>
+        <p:nvSpPr>
+          <p:cNvPr id="8" name="Text 6"/>
+          <p:cNvSpPr/>
+          <p:nvPr/>
+        </p:nvSpPr>
+        <p:spPr>
+          <a:xfrm>
+            <a:off x="1005840" y="2743200"/>
+            <a:ext cx="10058400" cy="548640"/>
+          </a:xfrm>
+          <a:prstGeom prst="rect">
+            <a:avLst/>
+          </a:prstGeom>
+          <a:noFill/>
+          <a:ln/>
+        </p:spPr>
+        <p:txBody>
+          <a:bodyPr wrap="square" rtlCol="0" anchor="ctr"/>
+          <a:lstStyle/>
+          <a:p>
+            <a:pPr indent="0" marL="0">
+              <a:buNone/>
+            </a:pPr>
+            <a:r>
+              <a:rPr lang="en-US" sz="1500" dirty="0">
                 <a:solidFill>
                   <a:srgbClr val="3D3A36"/>
                 </a:solidFill>
-                <a:latin typeface="Calibri" pitchFamily="34" charset="0"/>
-                <a:ea typeface="Calibri" pitchFamily="34" charset="-122"/>
-                <a:cs typeface="Calibri" pitchFamily="34" charset="-120"/>
-              </a:rPr>
-              <a:t>Day: 24h37m. Year: 687 Earth days.</a:t>
-            </a:r>
-            <a:endParaRPr lang="en-US" sz="1600" dirty="0"/>
-          </a:p>
-          <a:p>
-            <a:pPr marL="342900" indent="-342900">
-              <a:spcAft>
-                <a:spcPts val="800"/>
-              </a:spcAft>
-              <a:buSzPct val="100000"/>
-              <a:buChar char="•"/>
-            </a:pPr>
-            <a:r>
-              <a:rPr lang="en-US" sz="1600" dirty="0">
+                <a:latin typeface="Arial" pitchFamily="34" charset="0"/>
+                <a:ea typeface="Arial" pitchFamily="34" charset="-122"/>
+                <a:cs typeface="Arial" pitchFamily="34" charset="-120"/>
+              </a:rPr>
+              <a:t>▸ Challenges — no oxygen, radiation, extreme cold, no liquid water</a:t>
+            </a:r>
+            <a:endParaRPr lang="en-US" sz="1500" dirty="0"/>
+          </a:p>
+        </p:txBody>
+      </p:sp>
+      <p:sp>
+        <p:nvSpPr>
+          <p:cNvPr id="9" name="Shape 7"/>
+          <p:cNvSpPr/>
+          <p:nvPr/>
+        </p:nvSpPr>
+        <p:spPr>
+          <a:xfrm>
+            <a:off x="731520" y="3474720"/>
+            <a:ext cx="10515600" cy="640080"/>
+          </a:xfrm>
+          <a:prstGeom prst="roundRect">
+            <a:avLst>
+              <a:gd name="adj" fmla="val 14286"/>
+            </a:avLst>
+          </a:prstGeom>
+          <a:solidFill>
+            <a:srgbClr val="FFFFFF"/>
+          </a:solidFill>
+          <a:ln w="6350">
+            <a:solidFill>
+              <a:srgbClr val="E5E2DC"/>
+            </a:solidFill>
+            <a:prstDash val="solid"/>
+          </a:ln>
+        </p:spPr>
+      </p:sp>
+      <p:sp>
+        <p:nvSpPr>
+          <p:cNvPr id="10" name="Text 8"/>
+          <p:cNvSpPr/>
+          <p:nvPr/>
+        </p:nvSpPr>
+        <p:spPr>
+          <a:xfrm>
+            <a:off x="1005840" y="3520440"/>
+            <a:ext cx="10058400" cy="548640"/>
+          </a:xfrm>
+          <a:prstGeom prst="rect">
+            <a:avLst/>
+          </a:prstGeom>
+          <a:noFill/>
+          <a:ln/>
+        </p:spPr>
+        <p:txBody>
+          <a:bodyPr wrap="square" rtlCol="0" anchor="ctr"/>
+          <a:lstStyle/>
+          <a:p>
+            <a:pPr indent="0" marL="0">
+              <a:buNone/>
+            </a:pPr>
+            <a:r>
+              <a:rPr lang="en-US" sz="1500" dirty="0">
                 <a:solidFill>
                   <a:srgbClr val="3D3A36"/>
                 </a:solidFill>
-                <a:latin typeface="Calibri" pitchFamily="34" charset="0"/>
-                <a:ea typeface="Calibri" pitchFamily="34" charset="-122"/>
-                <a:cs typeface="Calibri" pitchFamily="34" charset="-120"/>
-              </a:rPr>
-              <a:t>Evidence of past water: ice caps, hydrated minerals, river channels.</a:t>
-            </a:r>
-            <a:endParaRPr lang="en-US" sz="1600" dirty="0"/>
-          </a:p>
-          <a:p>
-            <a:pPr marL="342900" indent="-342900">
-              <a:spcAft>
-                <a:spcPts val="800"/>
-              </a:spcAft>
-              <a:buSzPct val="100000"/>
-              <a:buChar char="•"/>
-            </a:pPr>
-            <a:r>
-              <a:rPr lang="en-US" sz="1600" dirty="0">
+                <a:latin typeface="Arial" pitchFamily="34" charset="0"/>
+                <a:ea typeface="Arial" pitchFamily="34" charset="-122"/>
+                <a:cs typeface="Arial" pitchFamily="34" charset="-120"/>
+              </a:rPr>
+              <a:t>▸ Colony Design — life support, energy, food, shelter, ISRU</a:t>
+            </a:r>
+            <a:endParaRPr lang="en-US" sz="1500" dirty="0"/>
+          </a:p>
+        </p:txBody>
+      </p:sp>
+      <p:sp>
+        <p:nvSpPr>
+          <p:cNvPr id="11" name="Shape 9"/>
+          <p:cNvSpPr/>
+          <p:nvPr/>
+        </p:nvSpPr>
+        <p:spPr>
+          <a:xfrm>
+            <a:off x="731520" y="4251960"/>
+            <a:ext cx="10515600" cy="640080"/>
+          </a:xfrm>
+          <a:prstGeom prst="roundRect">
+            <a:avLst>
+              <a:gd name="adj" fmla="val 14286"/>
+            </a:avLst>
+          </a:prstGeom>
+          <a:solidFill>
+            <a:srgbClr val="F8F6F3"/>
+          </a:solidFill>
+          <a:ln w="6350">
+            <a:solidFill>
+              <a:srgbClr val="E5E2DC"/>
+            </a:solidFill>
+            <a:prstDash val="solid"/>
+          </a:ln>
+        </p:spPr>
+      </p:sp>
+      <p:sp>
+        <p:nvSpPr>
+          <p:cNvPr id="12" name="Text 10"/>
+          <p:cNvSpPr/>
+          <p:nvPr/>
+        </p:nvSpPr>
+        <p:spPr>
+          <a:xfrm>
+            <a:off x="1005840" y="4297680"/>
+            <a:ext cx="10058400" cy="548640"/>
+          </a:xfrm>
+          <a:prstGeom prst="rect">
+            <a:avLst/>
+          </a:prstGeom>
+          <a:noFill/>
+          <a:ln/>
+        </p:spPr>
+        <p:txBody>
+          <a:bodyPr wrap="square" rtlCol="0" anchor="ctr"/>
+          <a:lstStyle/>
+          <a:p>
+            <a:pPr indent="0" marL="0">
+              <a:buNone/>
+            </a:pPr>
+            <a:r>
+              <a:rPr lang="en-US" sz="1500" dirty="0">
                 <a:solidFill>
                   <a:srgbClr val="3D3A36"/>
                 </a:solidFill>
-                <a:latin typeface="Calibri" pitchFamily="34" charset="0"/>
-                <a:ea typeface="Calibri" pitchFamily="34" charset="-122"/>
-                <a:cs typeface="Calibri" pitchFamily="34" charset="-120"/>
-              </a:rPr>
-              <a:t>China's Zhurong rover exploring Utopia Planitia since 2021.</a:t>
-            </a:r>
-            <a:endParaRPr lang="en-US" sz="1600" dirty="0"/>
+                <a:latin typeface="Arial" pitchFamily="34" charset="0"/>
+                <a:ea typeface="Arial" pitchFamily="34" charset="-122"/>
+                <a:cs typeface="Arial" pitchFamily="34" charset="-120"/>
+              </a:rPr>
+              <a:t>▸ Space Race — NASA, CNSA, ESA, SpaceX, ISRO</a:t>
+            </a:r>
+            <a:endParaRPr lang="en-US" sz="1500" dirty="0"/>
+          </a:p>
+        </p:txBody>
+      </p:sp>
+      <p:sp>
+        <p:nvSpPr>
+          <p:cNvPr id="13" name="Shape 11"/>
+          <p:cNvSpPr/>
+          <p:nvPr/>
+        </p:nvSpPr>
+        <p:spPr>
+          <a:xfrm>
+            <a:off x="731520" y="5029200"/>
+            <a:ext cx="10515600" cy="640080"/>
+          </a:xfrm>
+          <a:prstGeom prst="roundRect">
+            <a:avLst>
+              <a:gd name="adj" fmla="val 14286"/>
+            </a:avLst>
+          </a:prstGeom>
+          <a:solidFill>
+            <a:srgbClr val="FFFFFF"/>
+          </a:solidFill>
+          <a:ln w="6350">
+            <a:solidFill>
+              <a:srgbClr val="E5E2DC"/>
+            </a:solidFill>
+            <a:prstDash val="solid"/>
+          </a:ln>
+        </p:spPr>
+      </p:sp>
+      <p:sp>
+        <p:nvSpPr>
+          <p:cNvPr id="14" name="Text 12"/>
+          <p:cNvSpPr/>
+          <p:nvPr/>
+        </p:nvSpPr>
+        <p:spPr>
+          <a:xfrm>
+            <a:off x="1005840" y="5074920"/>
+            <a:ext cx="10058400" cy="548640"/>
+          </a:xfrm>
+          <a:prstGeom prst="rect">
+            <a:avLst/>
+          </a:prstGeom>
+          <a:noFill/>
+          <a:ln/>
+        </p:spPr>
+        <p:txBody>
+          <a:bodyPr wrap="square" rtlCol="0" anchor="ctr"/>
+          <a:lstStyle/>
+          <a:p>
+            <a:pPr indent="0" marL="0">
+              <a:buNone/>
+            </a:pPr>
+            <a:r>
+              <a:rPr lang="en-US" sz="1500" dirty="0">
+                <a:solidFill>
+                  <a:srgbClr val="3D3A36"/>
+                </a:solidFill>
+                <a:latin typeface="Arial" pitchFamily="34" charset="0"/>
+                <a:ea typeface="Arial" pitchFamily="34" charset="-122"/>
+                <a:cs typeface="Arial" pitchFamily="34" charset="-120"/>
+              </a:rPr>
+              <a:t>▸ Ethics — for/against colonisation, planetary protection</a:t>
+            </a:r>
+            <a:endParaRPr lang="en-US" sz="1500" dirty="0"/>
+          </a:p>
+        </p:txBody>
+      </p:sp>
+      <p:sp>
+        <p:nvSpPr>
+          <p:cNvPr id="15" name="Shape 13"/>
+          <p:cNvSpPr/>
+          <p:nvPr/>
+        </p:nvSpPr>
+        <p:spPr>
+          <a:xfrm>
+            <a:off x="0" y="6492240"/>
+            <a:ext cx="12188952" cy="365760"/>
+          </a:xfrm>
+          <a:prstGeom prst="rect">
+            <a:avLst/>
+          </a:prstGeom>
+          <a:solidFill>
+            <a:srgbClr val="1B2A4A"/>
+          </a:solidFill>
+          <a:ln/>
+        </p:spPr>
+      </p:sp>
+      <p:sp>
+        <p:nvSpPr>
+          <p:cNvPr id="16" name="Text 14"/>
+          <p:cNvSpPr/>
+          <p:nvPr/>
+        </p:nvSpPr>
+        <p:spPr>
+          <a:xfrm>
+            <a:off x="10058400" y="6537960"/>
+            <a:ext cx="1828800" cy="274320"/>
+          </a:xfrm>
+          <a:prstGeom prst="rect">
+            <a:avLst/>
+          </a:prstGeom>
+          <a:noFill/>
+          <a:ln/>
+        </p:spPr>
+        <p:txBody>
+          <a:bodyPr wrap="square" rtlCol="0" anchor="ctr"/>
+          <a:lstStyle/>
+          <a:p>
+            <a:pPr algn="r" indent="0" marL="0">
+              <a:buNone/>
+            </a:pPr>
+            <a:r>
+              <a:rPr lang="en-US" sz="900" dirty="0">
+                <a:solidFill>
+                  <a:srgbClr val="E9C46A"/>
+                </a:solidFill>
+                <a:latin typeface="Arial" pitchFamily="34" charset="0"/>
+                <a:ea typeface="Arial" pitchFamily="34" charset="-122"/>
+                <a:cs typeface="Arial" pitchFamily="34" charset="-120"/>
+              </a:rPr>
+              <a:t>mrzocchi.com</a:t>
+            </a:r>
+            <a:endParaRPr lang="en-US" sz="900" dirty="0"/>
           </a:p>
         </p:txBody>
       </p:sp>
@@ -2100,13 +2423,13 @@
         <p:spPr>
           <a:xfrm>
             <a:off x="0" y="0"/>
-            <a:ext cx="9144000" cy="5143500"/>
-          </a:xfrm>
-          <a:prstGeom prst="rect">
-            <a:avLst/>
-          </a:prstGeom>
-          <a:solidFill>
-            <a:srgbClr val="111D35"/>
+            <a:ext cx="12188952" cy="1097280"/>
+          </a:xfrm>
+          <a:prstGeom prst="rect">
+            <a:avLst/>
+          </a:prstGeom>
+          <a:solidFill>
+            <a:srgbClr val="1B2A4A"/>
           </a:solidFill>
           <a:ln/>
         </p:spPr>
@@ -2119,8 +2442,8 @@
         </p:nvSpPr>
         <p:spPr>
           <a:xfrm>
-            <a:off x="731520" y="914400"/>
-            <a:ext cx="1828800" cy="1097280"/>
+            <a:off x="548640" y="182880"/>
+            <a:ext cx="9144000" cy="731520"/>
           </a:xfrm>
           <a:prstGeom prst="rect">
             <a:avLst/>
@@ -2136,32 +2459,57 @@
               <a:buNone/>
             </a:pPr>
             <a:r>
-              <a:rPr lang="en-US" sz="7200" b="1" dirty="0">
-                <a:solidFill>
-                  <a:srgbClr val="E9C46A">
-                    <a:alpha val="70000"/>
-                  </a:srgbClr>
+              <a:rPr lang="en-US" sz="2600" b="1" dirty="0">
+                <a:solidFill>
+                  <a:srgbClr val="FFFFFF"/>
                 </a:solidFill>
                 <a:latin typeface="Georgia" pitchFamily="34" charset="0"/>
                 <a:ea typeface="Georgia" pitchFamily="34" charset="-122"/>
                 <a:cs typeface="Georgia" pitchFamily="34" charset="-120"/>
               </a:rPr>
-              <a:t>02</a:t>
-            </a:r>
-            <a:endParaRPr lang="en-US" sz="7200" dirty="0"/>
-          </a:p>
-        </p:txBody>
-      </p:sp>
-      <p:sp>
-        <p:nvSpPr>
-          <p:cNvPr id="4" name="Text 2"/>
-          <p:cNvSpPr/>
-          <p:nvPr/>
-        </p:nvSpPr>
-        <p:spPr>
-          <a:xfrm>
-            <a:off x="731520" y="2011680"/>
-            <a:ext cx="7680960" cy="1097280"/>
+              <a:t>🧠 Check Your Understanding</a:t>
+            </a:r>
+            <a:endParaRPr lang="en-US" sz="2600" dirty="0"/>
+          </a:p>
+        </p:txBody>
+      </p:sp>
+      <p:sp>
+        <p:nvSpPr>
+          <p:cNvPr id="4" name="Shape 2"/>
+          <p:cNvSpPr/>
+          <p:nvPr/>
+        </p:nvSpPr>
+        <p:spPr>
+          <a:xfrm>
+            <a:off x="548640" y="1371600"/>
+            <a:ext cx="10972800" cy="502920"/>
+          </a:xfrm>
+          <a:prstGeom prst="roundRect">
+            <a:avLst>
+              <a:gd name="adj" fmla="val 14545"/>
+            </a:avLst>
+          </a:prstGeom>
+          <a:solidFill>
+            <a:srgbClr val="FFFFFF"/>
+          </a:solidFill>
+          <a:ln w="12700">
+            <a:solidFill>
+              <a:srgbClr val="1B2A4A"/>
+            </a:solidFill>
+            <a:prstDash val="solid"/>
+          </a:ln>
+        </p:spPr>
+      </p:sp>
+      <p:sp>
+        <p:nvSpPr>
+          <p:cNvPr id="5" name="Text 3"/>
+          <p:cNvSpPr/>
+          <p:nvPr/>
+        </p:nvSpPr>
+        <p:spPr>
+          <a:xfrm>
+            <a:off x="822960" y="1389888"/>
+            <a:ext cx="10515600" cy="457200"/>
           </a:xfrm>
           <a:prstGeom prst="rect">
             <a:avLst/>
@@ -2177,39 +2525,520 @@
               <a:buNone/>
             </a:pPr>
             <a:r>
-              <a:rPr lang="en-US" sz="3200" b="1" dirty="0">
-                <a:solidFill>
-                  <a:srgbClr val="FFFFFF"/>
-                </a:solidFill>
-                <a:latin typeface="Georgia" pitchFamily="34" charset="0"/>
-                <a:ea typeface="Georgia" pitchFamily="34" charset="-122"/>
-                <a:cs typeface="Georgia" pitchFamily="34" charset="-120"/>
-              </a:rPr>
-              <a:t>Challenges &amp; Solutions</a:t>
-            </a:r>
-            <a:endParaRPr lang="en-US" sz="3200" dirty="0"/>
-          </a:p>
-        </p:txBody>
-      </p:sp>
-      <p:sp>
-        <p:nvSpPr>
-          <p:cNvPr id="5" name="Shape 3"/>
-          <p:cNvSpPr/>
-          <p:nvPr/>
-        </p:nvSpPr>
-        <p:spPr>
-          <a:xfrm>
-            <a:off x="731520" y="3200400"/>
-            <a:ext cx="1828800" cy="54864"/>
-          </a:xfrm>
-          <a:prstGeom prst="rect">
-            <a:avLst/>
-          </a:prstGeom>
-          <a:solidFill>
-            <a:srgbClr val="E9C46A"/>
-          </a:solidFill>
-          <a:ln/>
-        </p:spPr>
+              <a:rPr lang="en-US" sz="1400" b="1" dirty="0">
+                <a:solidFill>
+                  <a:srgbClr val="1B2A4A"/>
+                </a:solidFill>
+                <a:latin typeface="Arial" pitchFamily="34" charset="0"/>
+                <a:ea typeface="Arial" pitchFamily="34" charset="-122"/>
+                <a:cs typeface="Arial" pitchFamily="34" charset="-120"/>
+              </a:rPr>
+              <a:t>Q1: What is Mars's atmosphere made of?</a:t>
+            </a:r>
+            <a:endParaRPr lang="en-US" sz="1400" dirty="0"/>
+          </a:p>
+        </p:txBody>
+      </p:sp>
+      <p:sp>
+        <p:nvSpPr>
+          <p:cNvPr id="6" name="Shape 4"/>
+          <p:cNvSpPr/>
+          <p:nvPr/>
+        </p:nvSpPr>
+        <p:spPr>
+          <a:xfrm>
+            <a:off x="1097280" y="1965960"/>
+            <a:ext cx="10424160" cy="502920"/>
+          </a:xfrm>
+          <a:prstGeom prst="roundRect">
+            <a:avLst>
+              <a:gd name="adj" fmla="val 14545"/>
+            </a:avLst>
+          </a:prstGeom>
+          <a:solidFill>
+            <a:srgbClr val="F3F1EE"/>
+          </a:solidFill>
+          <a:ln/>
+        </p:spPr>
+      </p:sp>
+      <p:sp>
+        <p:nvSpPr>
+          <p:cNvPr id="7" name="Text 5"/>
+          <p:cNvSpPr/>
+          <p:nvPr/>
+        </p:nvSpPr>
+        <p:spPr>
+          <a:xfrm>
+            <a:off x="1371600" y="1984248"/>
+            <a:ext cx="9875520" cy="457200"/>
+          </a:xfrm>
+          <a:prstGeom prst="rect">
+            <a:avLst/>
+          </a:prstGeom>
+          <a:noFill/>
+          <a:ln/>
+        </p:spPr>
+        <p:txBody>
+          <a:bodyPr wrap="square" rtlCol="0" anchor="ctr"/>
+          <a:lstStyle/>
+          <a:p>
+            <a:pPr indent="0" marL="0">
+              <a:buNone/>
+            </a:pPr>
+            <a:r>
+              <a:rPr lang="en-US" sz="1300" i="1" dirty="0">
+                <a:solidFill>
+                  <a:srgbClr val="6B6660"/>
+                </a:solidFill>
+                <a:latin typeface="Arial" pitchFamily="34" charset="0"/>
+                <a:ea typeface="Arial" pitchFamily="34" charset="-122"/>
+                <a:cs typeface="Arial" pitchFamily="34" charset="-120"/>
+              </a:rPr>
+              <a:t>→ ~95% carbon dioxide, very thin (1% of Earth's pressure).</a:t>
+            </a:r>
+            <a:endParaRPr lang="en-US" sz="1300" dirty="0"/>
+          </a:p>
+        </p:txBody>
+      </p:sp>
+      <p:sp>
+        <p:nvSpPr>
+          <p:cNvPr id="8" name="Shape 6"/>
+          <p:cNvSpPr/>
+          <p:nvPr/>
+        </p:nvSpPr>
+        <p:spPr>
+          <a:xfrm>
+            <a:off x="548640" y="2606040"/>
+            <a:ext cx="10972800" cy="502920"/>
+          </a:xfrm>
+          <a:prstGeom prst="roundRect">
+            <a:avLst>
+              <a:gd name="adj" fmla="val 14545"/>
+            </a:avLst>
+          </a:prstGeom>
+          <a:solidFill>
+            <a:srgbClr val="FFFFFF"/>
+          </a:solidFill>
+          <a:ln w="12700">
+            <a:solidFill>
+              <a:srgbClr val="1B2A4A"/>
+            </a:solidFill>
+            <a:prstDash val="solid"/>
+          </a:ln>
+        </p:spPr>
+      </p:sp>
+      <p:sp>
+        <p:nvSpPr>
+          <p:cNvPr id="9" name="Text 7"/>
+          <p:cNvSpPr/>
+          <p:nvPr/>
+        </p:nvSpPr>
+        <p:spPr>
+          <a:xfrm>
+            <a:off x="822960" y="2624328"/>
+            <a:ext cx="10515600" cy="457200"/>
+          </a:xfrm>
+          <a:prstGeom prst="rect">
+            <a:avLst/>
+          </a:prstGeom>
+          <a:noFill/>
+          <a:ln/>
+        </p:spPr>
+        <p:txBody>
+          <a:bodyPr wrap="square" rtlCol="0" anchor="ctr"/>
+          <a:lstStyle/>
+          <a:p>
+            <a:pPr indent="0" marL="0">
+              <a:buNone/>
+            </a:pPr>
+            <a:r>
+              <a:rPr lang="en-US" sz="1400" b="1" dirty="0">
+                <a:solidFill>
+                  <a:srgbClr val="1B2A4A"/>
+                </a:solidFill>
+                <a:latin typeface="Arial" pitchFamily="34" charset="0"/>
+                <a:ea typeface="Arial" pitchFamily="34" charset="-122"/>
+                <a:cs typeface="Arial" pitchFamily="34" charset="-120"/>
+              </a:rPr>
+              <a:t>Q2: Name two challenges of living on Mars.</a:t>
+            </a:r>
+            <a:endParaRPr lang="en-US" sz="1400" dirty="0"/>
+          </a:p>
+        </p:txBody>
+      </p:sp>
+      <p:sp>
+        <p:nvSpPr>
+          <p:cNvPr id="10" name="Shape 8"/>
+          <p:cNvSpPr/>
+          <p:nvPr/>
+        </p:nvSpPr>
+        <p:spPr>
+          <a:xfrm>
+            <a:off x="1097280" y="3200400"/>
+            <a:ext cx="10424160" cy="502920"/>
+          </a:xfrm>
+          <a:prstGeom prst="roundRect">
+            <a:avLst>
+              <a:gd name="adj" fmla="val 14545"/>
+            </a:avLst>
+          </a:prstGeom>
+          <a:solidFill>
+            <a:srgbClr val="F3F1EE"/>
+          </a:solidFill>
+          <a:ln/>
+        </p:spPr>
+      </p:sp>
+      <p:sp>
+        <p:nvSpPr>
+          <p:cNvPr id="11" name="Text 9"/>
+          <p:cNvSpPr/>
+          <p:nvPr/>
+        </p:nvSpPr>
+        <p:spPr>
+          <a:xfrm>
+            <a:off x="1371600" y="3218688"/>
+            <a:ext cx="9875520" cy="457200"/>
+          </a:xfrm>
+          <a:prstGeom prst="rect">
+            <a:avLst/>
+          </a:prstGeom>
+          <a:noFill/>
+          <a:ln/>
+        </p:spPr>
+        <p:txBody>
+          <a:bodyPr wrap="square" rtlCol="0" anchor="ctr"/>
+          <a:lstStyle/>
+          <a:p>
+            <a:pPr indent="0" marL="0">
+              <a:buNone/>
+            </a:pPr>
+            <a:r>
+              <a:rPr lang="en-US" sz="1300" i="1" dirty="0">
+                <a:solidFill>
+                  <a:srgbClr val="6B6660"/>
+                </a:solidFill>
+                <a:latin typeface="Arial" pitchFamily="34" charset="0"/>
+                <a:ea typeface="Arial" pitchFamily="34" charset="-122"/>
+                <a:cs typeface="Arial" pitchFamily="34" charset="-120"/>
+              </a:rPr>
+              <a:t>→ No breathable air, radiation, extreme cold (any two).</a:t>
+            </a:r>
+            <a:endParaRPr lang="en-US" sz="1300" dirty="0"/>
+          </a:p>
+        </p:txBody>
+      </p:sp>
+      <p:sp>
+        <p:nvSpPr>
+          <p:cNvPr id="12" name="Shape 10"/>
+          <p:cNvSpPr/>
+          <p:nvPr/>
+        </p:nvSpPr>
+        <p:spPr>
+          <a:xfrm>
+            <a:off x="548640" y="3840480"/>
+            <a:ext cx="10972800" cy="502920"/>
+          </a:xfrm>
+          <a:prstGeom prst="roundRect">
+            <a:avLst>
+              <a:gd name="adj" fmla="val 14545"/>
+            </a:avLst>
+          </a:prstGeom>
+          <a:solidFill>
+            <a:srgbClr val="FFFFFF"/>
+          </a:solidFill>
+          <a:ln w="12700">
+            <a:solidFill>
+              <a:srgbClr val="1B2A4A"/>
+            </a:solidFill>
+            <a:prstDash val="solid"/>
+          </a:ln>
+        </p:spPr>
+      </p:sp>
+      <p:sp>
+        <p:nvSpPr>
+          <p:cNvPr id="13" name="Text 11"/>
+          <p:cNvSpPr/>
+          <p:nvPr/>
+        </p:nvSpPr>
+        <p:spPr>
+          <a:xfrm>
+            <a:off x="822960" y="3858768"/>
+            <a:ext cx="10515600" cy="457200"/>
+          </a:xfrm>
+          <a:prstGeom prst="rect">
+            <a:avLst/>
+          </a:prstGeom>
+          <a:noFill/>
+          <a:ln/>
+        </p:spPr>
+        <p:txBody>
+          <a:bodyPr wrap="square" rtlCol="0" anchor="ctr"/>
+          <a:lstStyle/>
+          <a:p>
+            <a:pPr indent="0" marL="0">
+              <a:buNone/>
+            </a:pPr>
+            <a:r>
+              <a:rPr lang="en-US" sz="1400" b="1" dirty="0">
+                <a:solidFill>
+                  <a:srgbClr val="1B2A4A"/>
+                </a:solidFill>
+                <a:latin typeface="Arial" pitchFamily="34" charset="0"/>
+                <a:ea typeface="Arial" pitchFamily="34" charset="-122"/>
+                <a:cs typeface="Arial" pitchFamily="34" charset="-120"/>
+              </a:rPr>
+              <a:t>Q3: What is ISRU?</a:t>
+            </a:r>
+            <a:endParaRPr lang="en-US" sz="1400" dirty="0"/>
+          </a:p>
+        </p:txBody>
+      </p:sp>
+      <p:sp>
+        <p:nvSpPr>
+          <p:cNvPr id="14" name="Shape 12"/>
+          <p:cNvSpPr/>
+          <p:nvPr/>
+        </p:nvSpPr>
+        <p:spPr>
+          <a:xfrm>
+            <a:off x="1097280" y="4434840"/>
+            <a:ext cx="10424160" cy="502920"/>
+          </a:xfrm>
+          <a:prstGeom prst="roundRect">
+            <a:avLst>
+              <a:gd name="adj" fmla="val 14545"/>
+            </a:avLst>
+          </a:prstGeom>
+          <a:solidFill>
+            <a:srgbClr val="F3F1EE"/>
+          </a:solidFill>
+          <a:ln/>
+        </p:spPr>
+      </p:sp>
+      <p:sp>
+        <p:nvSpPr>
+          <p:cNvPr id="15" name="Text 13"/>
+          <p:cNvSpPr/>
+          <p:nvPr/>
+        </p:nvSpPr>
+        <p:spPr>
+          <a:xfrm>
+            <a:off x="1371600" y="4453128"/>
+            <a:ext cx="9875520" cy="457200"/>
+          </a:xfrm>
+          <a:prstGeom prst="rect">
+            <a:avLst/>
+          </a:prstGeom>
+          <a:noFill/>
+          <a:ln/>
+        </p:spPr>
+        <p:txBody>
+          <a:bodyPr wrap="square" rtlCol="0" anchor="ctr"/>
+          <a:lstStyle/>
+          <a:p>
+            <a:pPr indent="0" marL="0">
+              <a:buNone/>
+            </a:pPr>
+            <a:r>
+              <a:rPr lang="en-US" sz="1300" i="1" dirty="0">
+                <a:solidFill>
+                  <a:srgbClr val="6B6660"/>
+                </a:solidFill>
+                <a:latin typeface="Arial" pitchFamily="34" charset="0"/>
+                <a:ea typeface="Arial" pitchFamily="34" charset="-122"/>
+                <a:cs typeface="Arial" pitchFamily="34" charset="-120"/>
+              </a:rPr>
+              <a:t>→ In-Situ Resource Utilisation — using Mars's own resources.</a:t>
+            </a:r>
+            <a:endParaRPr lang="en-US" sz="1300" dirty="0"/>
+          </a:p>
+        </p:txBody>
+      </p:sp>
+      <p:sp>
+        <p:nvSpPr>
+          <p:cNvPr id="16" name="Shape 14"/>
+          <p:cNvSpPr/>
+          <p:nvPr/>
+        </p:nvSpPr>
+        <p:spPr>
+          <a:xfrm>
+            <a:off x="548640" y="5074920"/>
+            <a:ext cx="10972800" cy="502920"/>
+          </a:xfrm>
+          <a:prstGeom prst="roundRect">
+            <a:avLst>
+              <a:gd name="adj" fmla="val 14545"/>
+            </a:avLst>
+          </a:prstGeom>
+          <a:solidFill>
+            <a:srgbClr val="FFFFFF"/>
+          </a:solidFill>
+          <a:ln w="12700">
+            <a:solidFill>
+              <a:srgbClr val="1B2A4A"/>
+            </a:solidFill>
+            <a:prstDash val="solid"/>
+          </a:ln>
+        </p:spPr>
+      </p:sp>
+      <p:sp>
+        <p:nvSpPr>
+          <p:cNvPr id="17" name="Text 15"/>
+          <p:cNvSpPr/>
+          <p:nvPr/>
+        </p:nvSpPr>
+        <p:spPr>
+          <a:xfrm>
+            <a:off x="822960" y="5093208"/>
+            <a:ext cx="10515600" cy="457200"/>
+          </a:xfrm>
+          <a:prstGeom prst="rect">
+            <a:avLst/>
+          </a:prstGeom>
+          <a:noFill/>
+          <a:ln/>
+        </p:spPr>
+        <p:txBody>
+          <a:bodyPr wrap="square" rtlCol="0" anchor="ctr"/>
+          <a:lstStyle/>
+          <a:p>
+            <a:pPr indent="0" marL="0">
+              <a:buNone/>
+            </a:pPr>
+            <a:r>
+              <a:rPr lang="en-US" sz="1400" b="1" dirty="0">
+                <a:solidFill>
+                  <a:srgbClr val="1B2A4A"/>
+                </a:solidFill>
+                <a:latin typeface="Arial" pitchFamily="34" charset="0"/>
+                <a:ea typeface="Arial" pitchFamily="34" charset="-122"/>
+                <a:cs typeface="Arial" pitchFamily="34" charset="-120"/>
+              </a:rPr>
+              <a:t>Q4: Name two ethical concerns about Mars colonisation.</a:t>
+            </a:r>
+            <a:endParaRPr lang="en-US" sz="1400" dirty="0"/>
+          </a:p>
+        </p:txBody>
+      </p:sp>
+      <p:sp>
+        <p:nvSpPr>
+          <p:cNvPr id="18" name="Shape 16"/>
+          <p:cNvSpPr/>
+          <p:nvPr/>
+        </p:nvSpPr>
+        <p:spPr>
+          <a:xfrm>
+            <a:off x="1097280" y="5669280"/>
+            <a:ext cx="10424160" cy="502920"/>
+          </a:xfrm>
+          <a:prstGeom prst="roundRect">
+            <a:avLst>
+              <a:gd name="adj" fmla="val 14545"/>
+            </a:avLst>
+          </a:prstGeom>
+          <a:solidFill>
+            <a:srgbClr val="F3F1EE"/>
+          </a:solidFill>
+          <a:ln/>
+        </p:spPr>
+      </p:sp>
+      <p:sp>
+        <p:nvSpPr>
+          <p:cNvPr id="19" name="Text 17"/>
+          <p:cNvSpPr/>
+          <p:nvPr/>
+        </p:nvSpPr>
+        <p:spPr>
+          <a:xfrm>
+            <a:off x="1371600" y="5687568"/>
+            <a:ext cx="9875520" cy="457200"/>
+          </a:xfrm>
+          <a:prstGeom prst="rect">
+            <a:avLst/>
+          </a:prstGeom>
+          <a:noFill/>
+          <a:ln/>
+        </p:spPr>
+        <p:txBody>
+          <a:bodyPr wrap="square" rtlCol="0" anchor="ctr"/>
+          <a:lstStyle/>
+          <a:p>
+            <a:pPr indent="0" marL="0">
+              <a:buNone/>
+            </a:pPr>
+            <a:r>
+              <a:rPr lang="en-US" sz="1300" i="1" dirty="0">
+                <a:solidFill>
+                  <a:srgbClr val="6B6660"/>
+                </a:solidFill>
+                <a:latin typeface="Arial" pitchFamily="34" charset="0"/>
+                <a:ea typeface="Arial" pitchFamily="34" charset="-122"/>
+                <a:cs typeface="Arial" pitchFamily="34" charset="-120"/>
+              </a:rPr>
+              <a:t>→ Cost, contamination, governance, inequality (any two).</a:t>
+            </a:r>
+            <a:endParaRPr lang="en-US" sz="1300" dirty="0"/>
+          </a:p>
+        </p:txBody>
+      </p:sp>
+      <p:sp>
+        <p:nvSpPr>
+          <p:cNvPr id="20" name="Shape 18"/>
+          <p:cNvSpPr/>
+          <p:nvPr/>
+        </p:nvSpPr>
+        <p:spPr>
+          <a:xfrm>
+            <a:off x="0" y="6492240"/>
+            <a:ext cx="12188952" cy="365760"/>
+          </a:xfrm>
+          <a:prstGeom prst="rect">
+            <a:avLst/>
+          </a:prstGeom>
+          <a:solidFill>
+            <a:srgbClr val="1B2A4A"/>
+          </a:solidFill>
+          <a:ln/>
+        </p:spPr>
+      </p:sp>
+      <p:sp>
+        <p:nvSpPr>
+          <p:cNvPr id="21" name="Text 19"/>
+          <p:cNvSpPr/>
+          <p:nvPr/>
+        </p:nvSpPr>
+        <p:spPr>
+          <a:xfrm>
+            <a:off x="10058400" y="6537960"/>
+            <a:ext cx="1828800" cy="274320"/>
+          </a:xfrm>
+          <a:prstGeom prst="rect">
+            <a:avLst/>
+          </a:prstGeom>
+          <a:noFill/>
+          <a:ln/>
+        </p:spPr>
+        <p:txBody>
+          <a:bodyPr wrap="square" rtlCol="0" anchor="ctr"/>
+          <a:lstStyle/>
+          <a:p>
+            <a:pPr algn="r" indent="0" marL="0">
+              <a:buNone/>
+            </a:pPr>
+            <a:r>
+              <a:rPr lang="en-US" sz="900" dirty="0">
+                <a:solidFill>
+                  <a:srgbClr val="E9C46A"/>
+                </a:solidFill>
+                <a:latin typeface="Arial" pitchFamily="34" charset="0"/>
+                <a:ea typeface="Arial" pitchFamily="34" charset="-122"/>
+                <a:cs typeface="Arial" pitchFamily="34" charset="-120"/>
+              </a:rPr>
+              <a:t>mrzocchi.com</a:t>
+            </a:r>
+            <a:endParaRPr lang="en-US" sz="900" dirty="0"/>
+          </a:p>
+        </p:txBody>
       </p:sp>
     </p:spTree>
   </p:cSld>
@@ -2222,13 +3051,6 @@
 <file path=ppt/slides/slide5.xml><?xml version="1.0" encoding="utf-8"?>
 <p:sld xmlns:a="http://schemas.openxmlformats.org/drawingml/2006/main" xmlns:r="http://schemas.openxmlformats.org/officeDocument/2006/relationships" xmlns:p="http://schemas.openxmlformats.org/presentationml/2006/main">
   <p:cSld name="Slide 5">
-    <p:bg>
-      <p:bgPr>
-        <a:solidFill>
-          <a:srgbClr val="FAF8F5"/>
-        </a:solidFill>
-      </p:bgPr>
-    </p:bg>
     <p:spTree>
       <p:nvGrpSpPr>
         <p:cNvPr id="1" name=""/>
@@ -2252,75 +3074,82 @@
         <p:spPr>
           <a:xfrm>
             <a:off x="0" y="0"/>
-            <a:ext cx="9144000" cy="822960"/>
-          </a:xfrm>
-          <a:prstGeom prst="rect">
-            <a:avLst/>
-          </a:prstGeom>
-          <a:solidFill>
-            <a:srgbClr val="FFFFFF"/>
-          </a:solidFill>
-          <a:ln/>
-        </p:spPr>
-      </p:sp>
-      <p:sp>
-        <p:nvSpPr>
-          <p:cNvPr id="3" name="Shape 1"/>
-          <p:cNvSpPr/>
-          <p:nvPr/>
-        </p:nvSpPr>
-        <p:spPr>
-          <a:xfrm>
-            <a:off x="0" y="795528"/>
-            <a:ext cx="9144000" cy="27432"/>
-          </a:xfrm>
-          <a:prstGeom prst="rect">
-            <a:avLst/>
-          </a:prstGeom>
-          <a:solidFill>
-            <a:srgbClr val="E9C46A"/>
-          </a:solidFill>
-          <a:ln/>
-        </p:spPr>
-      </p:sp>
-      <p:sp>
-        <p:nvSpPr>
-          <p:cNvPr id="4" name="Text 2"/>
-          <p:cNvSpPr/>
-          <p:nvPr/>
-        </p:nvSpPr>
-        <p:spPr>
-          <a:xfrm>
-            <a:off x="640080" y="91440"/>
-            <a:ext cx="7863840" cy="640080"/>
-          </a:xfrm>
-          <a:prstGeom prst="rect">
-            <a:avLst/>
-          </a:prstGeom>
-          <a:noFill/>
-          <a:ln/>
-        </p:spPr>
-        <p:txBody>
-          <a:bodyPr wrap="square" lIns="0" tIns="0" rIns="0" bIns="0" rtlCol="0" anchor="ctr"/>
+            <a:ext cx="12188952" cy="1097280"/>
+          </a:xfrm>
+          <a:prstGeom prst="rect">
+            <a:avLst/>
+          </a:prstGeom>
+          <a:solidFill>
+            <a:srgbClr val="1B2A4A"/>
+          </a:solidFill>
+          <a:ln/>
+        </p:spPr>
+      </p:sp>
+      <p:sp>
+        <p:nvSpPr>
+          <p:cNvPr id="3" name="Text 1"/>
+          <p:cNvSpPr/>
+          <p:nvPr/>
+        </p:nvSpPr>
+        <p:spPr>
+          <a:xfrm>
+            <a:off x="548640" y="182880"/>
+            <a:ext cx="9144000" cy="731520"/>
+          </a:xfrm>
+          <a:prstGeom prst="rect">
+            <a:avLst/>
+          </a:prstGeom>
+          <a:noFill/>
+          <a:ln/>
+        </p:spPr>
+        <p:txBody>
+          <a:bodyPr wrap="square" rtlCol="0" anchor="ctr"/>
           <a:lstStyle/>
           <a:p>
             <a:pPr indent="0" marL="0">
               <a:buNone/>
             </a:pPr>
             <a:r>
-              <a:rPr lang="en-US" sz="2200" b="1" dirty="0">
-                <a:solidFill>
-                  <a:srgbClr val="1B2A4A"/>
+              <a:rPr lang="en-US" sz="2600" b="1" dirty="0">
+                <a:solidFill>
+                  <a:srgbClr val="FFFFFF"/>
                 </a:solidFill>
                 <a:latin typeface="Georgia" pitchFamily="34" charset="0"/>
                 <a:ea typeface="Georgia" pitchFamily="34" charset="-122"/>
                 <a:cs typeface="Georgia" pitchFamily="34" charset="-120"/>
               </a:rPr>
-              <a:t>Challenges Recap</a:t>
-            </a:r>
-            <a:endParaRPr lang="en-US" sz="2200" dirty="0"/>
-          </a:p>
-        </p:txBody>
+              <a:t>📌 Key Takeaways</a:t>
+            </a:r>
+            <a:endParaRPr lang="en-US" sz="2600" dirty="0"/>
+          </a:p>
+        </p:txBody>
+      </p:sp>
+      <p:sp>
+        <p:nvSpPr>
+          <p:cNvPr id="4" name="Shape 2"/>
+          <p:cNvSpPr/>
+          <p:nvPr/>
+        </p:nvSpPr>
+        <p:spPr>
+          <a:xfrm>
+            <a:off x="731520" y="1463040"/>
+            <a:ext cx="10515600" cy="685800"/>
+          </a:xfrm>
+          <a:prstGeom prst="roundRect">
+            <a:avLst>
+              <a:gd name="adj" fmla="val 16000"/>
+            </a:avLst>
+          </a:prstGeom>
+          <a:solidFill>
+            <a:srgbClr val="FFFFFF"/>
+          </a:solidFill>
+          <a:ln w="19050">
+            <a:solidFill>
+              <a:srgbClr val="1B2A4A"/>
+            </a:solidFill>
+            <a:prstDash val="solid"/>
+          </a:ln>
+        </p:spPr>
       </p:sp>
       <p:sp>
         <p:nvSpPr>
@@ -2330,122 +3159,552 @@
         </p:nvSpPr>
         <p:spPr>
           <a:xfrm>
-            <a:off x="640080" y="1005840"/>
-            <a:ext cx="7863840" cy="2926080"/>
-          </a:xfrm>
-          <a:prstGeom prst="rect">
-            <a:avLst/>
-          </a:prstGeom>
-          <a:noFill/>
-          <a:ln/>
-        </p:spPr>
-        <p:txBody>
-          <a:bodyPr wrap="square" rtlCol="0" anchor="ctr"/>
-          <a:lstStyle/>
-          <a:p>
-            <a:pPr marL="342900" indent="-342900">
-              <a:spcAft>
-                <a:spcPts val="800"/>
-              </a:spcAft>
-              <a:buSzPct val="100000"/>
-              <a:buChar char="•"/>
-            </a:pPr>
-            <a:r>
-              <a:rPr lang="en-US" sz="1600" dirty="0">
+            <a:off x="914400" y="1554480"/>
+            <a:ext cx="365760" cy="457200"/>
+          </a:xfrm>
+          <a:prstGeom prst="rect">
+            <a:avLst/>
+          </a:prstGeom>
+          <a:noFill/>
+          <a:ln/>
+        </p:spPr>
+        <p:txBody>
+          <a:bodyPr wrap="square" rtlCol="0" anchor="ctr"/>
+          <a:lstStyle/>
+          <a:p>
+            <a:pPr indent="0" marL="0">
+              <a:buNone/>
+            </a:pPr>
+            <a:r>
+              <a:rPr lang="en-US" sz="1600" b="1" dirty="0">
+                <a:solidFill>
+                  <a:srgbClr val="1B2A4A"/>
+                </a:solidFill>
+                <a:latin typeface="Arial" pitchFamily="34" charset="0"/>
+                <a:ea typeface="Arial" pitchFamily="34" charset="-122"/>
+                <a:cs typeface="Arial" pitchFamily="34" charset="-120"/>
+              </a:rPr>
+              <a:t>✓</a:t>
+            </a:r>
+            <a:endParaRPr lang="en-US" sz="1600" dirty="0"/>
+          </a:p>
+        </p:txBody>
+      </p:sp>
+      <p:sp>
+        <p:nvSpPr>
+          <p:cNvPr id="6" name="Text 4"/>
+          <p:cNvSpPr/>
+          <p:nvPr/>
+        </p:nvSpPr>
+        <p:spPr>
+          <a:xfrm>
+            <a:off x="1371600" y="1554480"/>
+            <a:ext cx="9601200" cy="502920"/>
+          </a:xfrm>
+          <a:prstGeom prst="rect">
+            <a:avLst/>
+          </a:prstGeom>
+          <a:noFill/>
+          <a:ln/>
+        </p:spPr>
+        <p:txBody>
+          <a:bodyPr wrap="square" rtlCol="0" anchor="ctr"/>
+          <a:lstStyle/>
+          <a:p>
+            <a:pPr indent="0" marL="0">
+              <a:buNone/>
+            </a:pPr>
+            <a:r>
+              <a:rPr lang="en-US" sz="1500" dirty="0">
                 <a:solidFill>
                   <a:srgbClr val="3D3A36"/>
                 </a:solidFill>
-                <a:latin typeface="Calibri" pitchFamily="34" charset="0"/>
-                <a:ea typeface="Calibri" pitchFamily="34" charset="-122"/>
-                <a:cs typeface="Calibri" pitchFamily="34" charset="-120"/>
-              </a:rPr>
-              <a:t>Radiation: no magnetic field → underground habitats.</a:t>
+                <a:latin typeface="Arial" pitchFamily="34" charset="0"/>
+                <a:ea typeface="Arial" pitchFamily="34" charset="-122"/>
+                <a:cs typeface="Arial" pitchFamily="34" charset="-120"/>
+              </a:rPr>
+              <a:t>Mars: thin CO₂ atmosphere, −60°C average, no magnetic field</a:t>
+            </a:r>
+            <a:endParaRPr lang="en-US" sz="1500" dirty="0"/>
+          </a:p>
+        </p:txBody>
+      </p:sp>
+      <p:sp>
+        <p:nvSpPr>
+          <p:cNvPr id="7" name="Shape 5"/>
+          <p:cNvSpPr/>
+          <p:nvPr/>
+        </p:nvSpPr>
+        <p:spPr>
+          <a:xfrm>
+            <a:off x="731520" y="2286000"/>
+            <a:ext cx="10515600" cy="685800"/>
+          </a:xfrm>
+          <a:prstGeom prst="roundRect">
+            <a:avLst>
+              <a:gd name="adj" fmla="val 16000"/>
+            </a:avLst>
+          </a:prstGeom>
+          <a:solidFill>
+            <a:srgbClr val="FFFFFF"/>
+          </a:solidFill>
+          <a:ln w="19050">
+            <a:solidFill>
+              <a:srgbClr val="1B2A4A"/>
+            </a:solidFill>
+            <a:prstDash val="solid"/>
+          </a:ln>
+        </p:spPr>
+      </p:sp>
+      <p:sp>
+        <p:nvSpPr>
+          <p:cNvPr id="8" name="Text 6"/>
+          <p:cNvSpPr/>
+          <p:nvPr/>
+        </p:nvSpPr>
+        <p:spPr>
+          <a:xfrm>
+            <a:off x="914400" y="2377440"/>
+            <a:ext cx="365760" cy="457200"/>
+          </a:xfrm>
+          <a:prstGeom prst="rect">
+            <a:avLst/>
+          </a:prstGeom>
+          <a:noFill/>
+          <a:ln/>
+        </p:spPr>
+        <p:txBody>
+          <a:bodyPr wrap="square" rtlCol="0" anchor="ctr"/>
+          <a:lstStyle/>
+          <a:p>
+            <a:pPr indent="0" marL="0">
+              <a:buNone/>
+            </a:pPr>
+            <a:r>
+              <a:rPr lang="en-US" sz="1600" b="1" dirty="0">
+                <a:solidFill>
+                  <a:srgbClr val="1B2A4A"/>
+                </a:solidFill>
+                <a:latin typeface="Arial" pitchFamily="34" charset="0"/>
+                <a:ea typeface="Arial" pitchFamily="34" charset="-122"/>
+                <a:cs typeface="Arial" pitchFamily="34" charset="-120"/>
+              </a:rPr>
+              <a:t>✓</a:t>
             </a:r>
             <a:endParaRPr lang="en-US" sz="1600" dirty="0"/>
           </a:p>
-          <a:p>
-            <a:pPr marL="342900" indent="-342900">
-              <a:spcAft>
-                <a:spcPts val="800"/>
-              </a:spcAft>
-              <a:buSzPct val="100000"/>
-              <a:buChar char="•"/>
-            </a:pPr>
-            <a:r>
-              <a:rPr lang="en-US" sz="1600" dirty="0">
+        </p:txBody>
+      </p:sp>
+      <p:sp>
+        <p:nvSpPr>
+          <p:cNvPr id="9" name="Text 7"/>
+          <p:cNvSpPr/>
+          <p:nvPr/>
+        </p:nvSpPr>
+        <p:spPr>
+          <a:xfrm>
+            <a:off x="1371600" y="2377440"/>
+            <a:ext cx="9601200" cy="502920"/>
+          </a:xfrm>
+          <a:prstGeom prst="rect">
+            <a:avLst/>
+          </a:prstGeom>
+          <a:noFill/>
+          <a:ln/>
+        </p:spPr>
+        <p:txBody>
+          <a:bodyPr wrap="square" rtlCol="0" anchor="ctr"/>
+          <a:lstStyle/>
+          <a:p>
+            <a:pPr indent="0" marL="0">
+              <a:buNone/>
+            </a:pPr>
+            <a:r>
+              <a:rPr lang="en-US" sz="1500" dirty="0">
                 <a:solidFill>
                   <a:srgbClr val="3D3A36"/>
                 </a:solidFill>
-                <a:latin typeface="Calibri" pitchFamily="34" charset="0"/>
-                <a:ea typeface="Calibri" pitchFamily="34" charset="-122"/>
-                <a:cs typeface="Calibri" pitchFamily="34" charset="-120"/>
-              </a:rPr>
-              <a:t>Atmosphere: unbreathable → MOXIE oxygen production.</a:t>
+                <a:latin typeface="Arial" pitchFamily="34" charset="0"/>
+                <a:ea typeface="Arial" pitchFamily="34" charset="-122"/>
+                <a:cs typeface="Arial" pitchFamily="34" charset="-120"/>
+              </a:rPr>
+              <a:t>Challenges: air, radiation, cold, water, food, 6-9 month journey</a:t>
+            </a:r>
+            <a:endParaRPr lang="en-US" sz="1500" dirty="0"/>
+          </a:p>
+        </p:txBody>
+      </p:sp>
+      <p:sp>
+        <p:nvSpPr>
+          <p:cNvPr id="10" name="Shape 8"/>
+          <p:cNvSpPr/>
+          <p:nvPr/>
+        </p:nvSpPr>
+        <p:spPr>
+          <a:xfrm>
+            <a:off x="731520" y="3108960"/>
+            <a:ext cx="10515600" cy="685800"/>
+          </a:xfrm>
+          <a:prstGeom prst="roundRect">
+            <a:avLst>
+              <a:gd name="adj" fmla="val 16000"/>
+            </a:avLst>
+          </a:prstGeom>
+          <a:solidFill>
+            <a:srgbClr val="FFFFFF"/>
+          </a:solidFill>
+          <a:ln w="19050">
+            <a:solidFill>
+              <a:srgbClr val="1B2A4A"/>
+            </a:solidFill>
+            <a:prstDash val="solid"/>
+          </a:ln>
+        </p:spPr>
+      </p:sp>
+      <p:sp>
+        <p:nvSpPr>
+          <p:cNvPr id="11" name="Text 9"/>
+          <p:cNvSpPr/>
+          <p:nvPr/>
+        </p:nvSpPr>
+        <p:spPr>
+          <a:xfrm>
+            <a:off x="914400" y="3200400"/>
+            <a:ext cx="365760" cy="457200"/>
+          </a:xfrm>
+          <a:prstGeom prst="rect">
+            <a:avLst/>
+          </a:prstGeom>
+          <a:noFill/>
+          <a:ln/>
+        </p:spPr>
+        <p:txBody>
+          <a:bodyPr wrap="square" rtlCol="0" anchor="ctr"/>
+          <a:lstStyle/>
+          <a:p>
+            <a:pPr indent="0" marL="0">
+              <a:buNone/>
+            </a:pPr>
+            <a:r>
+              <a:rPr lang="en-US" sz="1600" b="1" dirty="0">
+                <a:solidFill>
+                  <a:srgbClr val="1B2A4A"/>
+                </a:solidFill>
+                <a:latin typeface="Arial" pitchFamily="34" charset="0"/>
+                <a:ea typeface="Arial" pitchFamily="34" charset="-122"/>
+                <a:cs typeface="Arial" pitchFamily="34" charset="-120"/>
+              </a:rPr>
+              <a:t>✓</a:t>
             </a:r>
             <a:endParaRPr lang="en-US" sz="1600" dirty="0"/>
           </a:p>
-          <a:p>
-            <a:pPr marL="342900" indent="-342900">
-              <a:spcAft>
-                <a:spcPts val="800"/>
-              </a:spcAft>
-              <a:buSzPct val="100000"/>
-              <a:buChar char="•"/>
-            </a:pPr>
-            <a:r>
-              <a:rPr lang="en-US" sz="1600" dirty="0">
+        </p:txBody>
+      </p:sp>
+      <p:sp>
+        <p:nvSpPr>
+          <p:cNvPr id="12" name="Text 10"/>
+          <p:cNvSpPr/>
+          <p:nvPr/>
+        </p:nvSpPr>
+        <p:spPr>
+          <a:xfrm>
+            <a:off x="1371600" y="3200400"/>
+            <a:ext cx="9601200" cy="502920"/>
+          </a:xfrm>
+          <a:prstGeom prst="rect">
+            <a:avLst/>
+          </a:prstGeom>
+          <a:noFill/>
+          <a:ln/>
+        </p:spPr>
+        <p:txBody>
+          <a:bodyPr wrap="square" rtlCol="0" anchor="ctr"/>
+          <a:lstStyle/>
+          <a:p>
+            <a:pPr indent="0" marL="0">
+              <a:buNone/>
+            </a:pPr>
+            <a:r>
+              <a:rPr lang="en-US" sz="1500" dirty="0">
                 <a:solidFill>
                   <a:srgbClr val="3D3A36"/>
                 </a:solidFill>
-                <a:latin typeface="Calibri" pitchFamily="34" charset="0"/>
-                <a:ea typeface="Calibri" pitchFamily="34" charset="-122"/>
-                <a:cs typeface="Calibri" pitchFamily="34" charset="-120"/>
-              </a:rPr>
-              <a:t>Temperature: extreme cold → insulation + nuclear power.</a:t>
+                <a:latin typeface="Arial" pitchFamily="34" charset="0"/>
+                <a:ea typeface="Arial" pitchFamily="34" charset="-122"/>
+                <a:cs typeface="Arial" pitchFamily="34" charset="-120"/>
+              </a:rPr>
+              <a:t>Colony needs: pressurised habitat, energy, hydroponics, water recycling</a:t>
+            </a:r>
+            <a:endParaRPr lang="en-US" sz="1500" dirty="0"/>
+          </a:p>
+        </p:txBody>
+      </p:sp>
+      <p:sp>
+        <p:nvSpPr>
+          <p:cNvPr id="13" name="Shape 11"/>
+          <p:cNvSpPr/>
+          <p:nvPr/>
+        </p:nvSpPr>
+        <p:spPr>
+          <a:xfrm>
+            <a:off x="731520" y="3931920"/>
+            <a:ext cx="10515600" cy="685800"/>
+          </a:xfrm>
+          <a:prstGeom prst="roundRect">
+            <a:avLst>
+              <a:gd name="adj" fmla="val 16000"/>
+            </a:avLst>
+          </a:prstGeom>
+          <a:solidFill>
+            <a:srgbClr val="FFFFFF"/>
+          </a:solidFill>
+          <a:ln w="19050">
+            <a:solidFill>
+              <a:srgbClr val="1B2A4A"/>
+            </a:solidFill>
+            <a:prstDash val="solid"/>
+          </a:ln>
+        </p:spPr>
+      </p:sp>
+      <p:sp>
+        <p:nvSpPr>
+          <p:cNvPr id="14" name="Text 12"/>
+          <p:cNvSpPr/>
+          <p:nvPr/>
+        </p:nvSpPr>
+        <p:spPr>
+          <a:xfrm>
+            <a:off x="914400" y="4023360"/>
+            <a:ext cx="365760" cy="457200"/>
+          </a:xfrm>
+          <a:prstGeom prst="rect">
+            <a:avLst/>
+          </a:prstGeom>
+          <a:noFill/>
+          <a:ln/>
+        </p:spPr>
+        <p:txBody>
+          <a:bodyPr wrap="square" rtlCol="0" anchor="ctr"/>
+          <a:lstStyle/>
+          <a:p>
+            <a:pPr indent="0" marL="0">
+              <a:buNone/>
+            </a:pPr>
+            <a:r>
+              <a:rPr lang="en-US" sz="1600" b="1" dirty="0">
+                <a:solidFill>
+                  <a:srgbClr val="1B2A4A"/>
+                </a:solidFill>
+                <a:latin typeface="Arial" pitchFamily="34" charset="0"/>
+                <a:ea typeface="Arial" pitchFamily="34" charset="-122"/>
+                <a:cs typeface="Arial" pitchFamily="34" charset="-120"/>
+              </a:rPr>
+              <a:t>✓</a:t>
             </a:r>
             <a:endParaRPr lang="en-US" sz="1600" dirty="0"/>
           </a:p>
-          <a:p>
-            <a:pPr marL="342900" indent="-342900">
-              <a:spcAft>
-                <a:spcPts val="800"/>
-              </a:spcAft>
-              <a:buSzPct val="100000"/>
-              <a:buChar char="•"/>
-            </a:pPr>
-            <a:r>
-              <a:rPr lang="en-US" sz="1600" dirty="0">
+        </p:txBody>
+      </p:sp>
+      <p:sp>
+        <p:nvSpPr>
+          <p:cNvPr id="15" name="Text 13"/>
+          <p:cNvSpPr/>
+          <p:nvPr/>
+        </p:nvSpPr>
+        <p:spPr>
+          <a:xfrm>
+            <a:off x="1371600" y="4023360"/>
+            <a:ext cx="9601200" cy="502920"/>
+          </a:xfrm>
+          <a:prstGeom prst="rect">
+            <a:avLst/>
+          </a:prstGeom>
+          <a:noFill/>
+          <a:ln/>
+        </p:spPr>
+        <p:txBody>
+          <a:bodyPr wrap="square" rtlCol="0" anchor="ctr"/>
+          <a:lstStyle/>
+          <a:p>
+            <a:pPr indent="0" marL="0">
+              <a:buNone/>
+            </a:pPr>
+            <a:r>
+              <a:rPr lang="en-US" sz="1500" dirty="0">
                 <a:solidFill>
                   <a:srgbClr val="3D3A36"/>
                 </a:solidFill>
-                <a:latin typeface="Calibri" pitchFamily="34" charset="0"/>
-                <a:ea typeface="Calibri" pitchFamily="34" charset="-122"/>
-                <a:cs typeface="Calibri" pitchFamily="34" charset="-120"/>
-              </a:rPr>
-              <a:t>Gravity: 38% → exercise protocols.</a:t>
+                <a:latin typeface="Arial" pitchFamily="34" charset="0"/>
+                <a:ea typeface="Arial" pitchFamily="34" charset="-122"/>
+                <a:cs typeface="Arial" pitchFamily="34" charset="-120"/>
+              </a:rPr>
+              <a:t>Multiple nations exploring Mars — China, USA, Europe, India, SpaceX</a:t>
+            </a:r>
+            <a:endParaRPr lang="en-US" sz="1500" dirty="0"/>
+          </a:p>
+        </p:txBody>
+      </p:sp>
+      <p:sp>
+        <p:nvSpPr>
+          <p:cNvPr id="16" name="Shape 14"/>
+          <p:cNvSpPr/>
+          <p:nvPr/>
+        </p:nvSpPr>
+        <p:spPr>
+          <a:xfrm>
+            <a:off x="731520" y="4754880"/>
+            <a:ext cx="10515600" cy="685800"/>
+          </a:xfrm>
+          <a:prstGeom prst="roundRect">
+            <a:avLst>
+              <a:gd name="adj" fmla="val 16000"/>
+            </a:avLst>
+          </a:prstGeom>
+          <a:solidFill>
+            <a:srgbClr val="FFFFFF"/>
+          </a:solidFill>
+          <a:ln w="19050">
+            <a:solidFill>
+              <a:srgbClr val="1B2A4A"/>
+            </a:solidFill>
+            <a:prstDash val="solid"/>
+          </a:ln>
+        </p:spPr>
+      </p:sp>
+      <p:sp>
+        <p:nvSpPr>
+          <p:cNvPr id="17" name="Text 15"/>
+          <p:cNvSpPr/>
+          <p:nvPr/>
+        </p:nvSpPr>
+        <p:spPr>
+          <a:xfrm>
+            <a:off x="914400" y="4846320"/>
+            <a:ext cx="365760" cy="457200"/>
+          </a:xfrm>
+          <a:prstGeom prst="rect">
+            <a:avLst/>
+          </a:prstGeom>
+          <a:noFill/>
+          <a:ln/>
+        </p:spPr>
+        <p:txBody>
+          <a:bodyPr wrap="square" rtlCol="0" anchor="ctr"/>
+          <a:lstStyle/>
+          <a:p>
+            <a:pPr indent="0" marL="0">
+              <a:buNone/>
+            </a:pPr>
+            <a:r>
+              <a:rPr lang="en-US" sz="1600" b="1" dirty="0">
+                <a:solidFill>
+                  <a:srgbClr val="1B2A4A"/>
+                </a:solidFill>
+                <a:latin typeface="Arial" pitchFamily="34" charset="0"/>
+                <a:ea typeface="Arial" pitchFamily="34" charset="-122"/>
+                <a:cs typeface="Arial" pitchFamily="34" charset="-120"/>
+              </a:rPr>
+              <a:t>✓</a:t>
             </a:r>
             <a:endParaRPr lang="en-US" sz="1600" dirty="0"/>
           </a:p>
-          <a:p>
-            <a:pPr marL="342900" indent="-342900">
-              <a:spcAft>
-                <a:spcPts val="800"/>
-              </a:spcAft>
-              <a:buSzPct val="100000"/>
-              <a:buChar char="•"/>
-            </a:pPr>
-            <a:r>
-              <a:rPr lang="en-US" sz="1600" dirty="0">
+        </p:txBody>
+      </p:sp>
+      <p:sp>
+        <p:nvSpPr>
+          <p:cNvPr id="18" name="Text 16"/>
+          <p:cNvSpPr/>
+          <p:nvPr/>
+        </p:nvSpPr>
+        <p:spPr>
+          <a:xfrm>
+            <a:off x="1371600" y="4846320"/>
+            <a:ext cx="9601200" cy="502920"/>
+          </a:xfrm>
+          <a:prstGeom prst="rect">
+            <a:avLst/>
+          </a:prstGeom>
+          <a:noFill/>
+          <a:ln/>
+        </p:spPr>
+        <p:txBody>
+          <a:bodyPr wrap="square" rtlCol="0" anchor="ctr"/>
+          <a:lstStyle/>
+          <a:p>
+            <a:pPr indent="0" marL="0">
+              <a:buNone/>
+            </a:pPr>
+            <a:r>
+              <a:rPr lang="en-US" sz="1500" dirty="0">
                 <a:solidFill>
                   <a:srgbClr val="3D3A36"/>
                 </a:solidFill>
-                <a:latin typeface="Calibri" pitchFamily="34" charset="0"/>
-                <a:ea typeface="Calibri" pitchFamily="34" charset="-122"/>
-                <a:cs typeface="Calibri" pitchFamily="34" charset="-120"/>
-              </a:rPr>
-              <a:t>Psychology: isolation → crew selection, VR, communication.</a:t>
-            </a:r>
-            <a:endParaRPr lang="en-US" sz="1600" dirty="0"/>
+                <a:latin typeface="Arial" pitchFamily="34" charset="0"/>
+                <a:ea typeface="Arial" pitchFamily="34" charset="-122"/>
+                <a:cs typeface="Arial" pitchFamily="34" charset="-120"/>
+              </a:rPr>
+              <a:t>Ethical debate: scientific value vs cost vs Earth priorities</a:t>
+            </a:r>
+            <a:endParaRPr lang="en-US" sz="1500" dirty="0"/>
+          </a:p>
+        </p:txBody>
+      </p:sp>
+      <p:sp>
+        <p:nvSpPr>
+          <p:cNvPr id="19" name="Shape 17"/>
+          <p:cNvSpPr/>
+          <p:nvPr/>
+        </p:nvSpPr>
+        <p:spPr>
+          <a:xfrm>
+            <a:off x="0" y="6492240"/>
+            <a:ext cx="12188952" cy="365760"/>
+          </a:xfrm>
+          <a:prstGeom prst="rect">
+            <a:avLst/>
+          </a:prstGeom>
+          <a:solidFill>
+            <a:srgbClr val="1B2A4A"/>
+          </a:solidFill>
+          <a:ln/>
+        </p:spPr>
+      </p:sp>
+      <p:sp>
+        <p:nvSpPr>
+          <p:cNvPr id="20" name="Text 18"/>
+          <p:cNvSpPr/>
+          <p:nvPr/>
+        </p:nvSpPr>
+        <p:spPr>
+          <a:xfrm>
+            <a:off x="10058400" y="6537960"/>
+            <a:ext cx="1828800" cy="274320"/>
+          </a:xfrm>
+          <a:prstGeom prst="rect">
+            <a:avLst/>
+          </a:prstGeom>
+          <a:noFill/>
+          <a:ln/>
+        </p:spPr>
+        <p:txBody>
+          <a:bodyPr wrap="square" rtlCol="0" anchor="ctr"/>
+          <a:lstStyle/>
+          <a:p>
+            <a:pPr algn="r" indent="0" marL="0">
+              <a:buNone/>
+            </a:pPr>
+            <a:r>
+              <a:rPr lang="en-US" sz="900" dirty="0">
+                <a:solidFill>
+                  <a:srgbClr val="E9C46A"/>
+                </a:solidFill>
+                <a:latin typeface="Arial" pitchFamily="34" charset="0"/>
+                <a:ea typeface="Arial" pitchFamily="34" charset="-122"/>
+                <a:cs typeface="Arial" pitchFamily="34" charset="-120"/>
+              </a:rPr>
+              <a:t>mrzocchi.com</a:t>
+            </a:r>
+            <a:endParaRPr lang="en-US" sz="900" dirty="0"/>
           </a:p>
         </p:txBody>
       </p:sp>
@@ -2483,225 +3742,73 @@
         <p:spPr>
           <a:xfrm>
             <a:off x="0" y="0"/>
-            <a:ext cx="9144000" cy="5143500"/>
-          </a:xfrm>
-          <a:prstGeom prst="rect">
-            <a:avLst/>
-          </a:prstGeom>
-          <a:solidFill>
-            <a:srgbClr val="111D35"/>
-          </a:solidFill>
-          <a:ln/>
-        </p:spPr>
-      </p:sp>
-      <p:sp>
-        <p:nvSpPr>
-          <p:cNvPr id="3" name="Text 1"/>
-          <p:cNvSpPr/>
-          <p:nvPr/>
-        </p:nvSpPr>
-        <p:spPr>
-          <a:xfrm>
-            <a:off x="731520" y="914400"/>
-            <a:ext cx="1828800" cy="1097280"/>
-          </a:xfrm>
-          <a:prstGeom prst="rect">
-            <a:avLst/>
-          </a:prstGeom>
-          <a:noFill/>
-          <a:ln/>
-        </p:spPr>
-        <p:txBody>
-          <a:bodyPr wrap="square" rtlCol="0" anchor="ctr"/>
-          <a:lstStyle/>
-          <a:p>
-            <a:pPr indent="0" marL="0">
-              <a:buNone/>
-            </a:pPr>
-            <a:r>
-              <a:rPr lang="en-US" sz="7200" b="1" dirty="0">
-                <a:solidFill>
-                  <a:srgbClr val="E9C46A">
-                    <a:alpha val="70000"/>
-                  </a:srgbClr>
+            <a:ext cx="12188952" cy="6858000"/>
+          </a:xfrm>
+          <a:prstGeom prst="rect">
+            <a:avLst/>
+          </a:prstGeom>
+          <a:solidFill>
+            <a:srgbClr val="1B2A4A"/>
+          </a:solidFill>
+          <a:ln/>
+        </p:spPr>
+      </p:sp>
+      <p:sp>
+        <p:nvSpPr>
+          <p:cNvPr id="3" name="Shape 1"/>
+          <p:cNvSpPr/>
+          <p:nvPr/>
+        </p:nvSpPr>
+        <p:spPr>
+          <a:xfrm>
+            <a:off x="0" y="6400800"/>
+            <a:ext cx="12188952" cy="73152"/>
+          </a:xfrm>
+          <a:prstGeom prst="rect">
+            <a:avLst/>
+          </a:prstGeom>
+          <a:solidFill>
+            <a:srgbClr val="1B2A4A"/>
+          </a:solidFill>
+          <a:ln/>
+        </p:spPr>
+      </p:sp>
+      <p:sp>
+        <p:nvSpPr>
+          <p:cNvPr id="4" name="Text 2"/>
+          <p:cNvSpPr/>
+          <p:nvPr/>
+        </p:nvSpPr>
+        <p:spPr>
+          <a:xfrm>
+            <a:off x="0" y="1828800"/>
+            <a:ext cx="12188952" cy="1097280"/>
+          </a:xfrm>
+          <a:prstGeom prst="rect">
+            <a:avLst/>
+          </a:prstGeom>
+          <a:noFill/>
+          <a:ln/>
+        </p:spPr>
+        <p:txBody>
+          <a:bodyPr wrap="square" rtlCol="0" anchor="ctr"/>
+          <a:lstStyle/>
+          <a:p>
+            <a:pPr algn="ctr" indent="0" marL="0">
+              <a:buNone/>
+            </a:pPr>
+            <a:r>
+              <a:rPr lang="en-US" sz="3600" b="1" dirty="0">
+                <a:solidFill>
+                  <a:srgbClr val="FFFFFF"/>
                 </a:solidFill>
                 <a:latin typeface="Georgia" pitchFamily="34" charset="0"/>
                 <a:ea typeface="Georgia" pitchFamily="34" charset="-122"/>
                 <a:cs typeface="Georgia" pitchFamily="34" charset="-120"/>
               </a:rPr>
-              <a:t>03</a:t>
-            </a:r>
-            <a:endParaRPr lang="en-US" sz="7200" dirty="0"/>
-          </a:p>
-        </p:txBody>
-      </p:sp>
-      <p:sp>
-        <p:nvSpPr>
-          <p:cNvPr id="4" name="Text 2"/>
-          <p:cNvSpPr/>
-          <p:nvPr/>
-        </p:nvSpPr>
-        <p:spPr>
-          <a:xfrm>
-            <a:off x="731520" y="2011680"/>
-            <a:ext cx="7680960" cy="1097280"/>
-          </a:xfrm>
-          <a:prstGeom prst="rect">
-            <a:avLst/>
-          </a:prstGeom>
-          <a:noFill/>
-          <a:ln/>
-        </p:spPr>
-        <p:txBody>
-          <a:bodyPr wrap="square" rtlCol="0" anchor="ctr"/>
-          <a:lstStyle/>
-          <a:p>
-            <a:pPr indent="0" marL="0">
-              <a:buNone/>
-            </a:pPr>
-            <a:r>
-              <a:rPr lang="en-US" sz="3200" b="1" dirty="0">
-                <a:solidFill>
-                  <a:srgbClr val="FFFFFF"/>
-                </a:solidFill>
-                <a:latin typeface="Georgia" pitchFamily="34" charset="0"/>
-                <a:ea typeface="Georgia" pitchFamily="34" charset="-122"/>
-                <a:cs typeface="Georgia" pitchFamily="34" charset="-120"/>
-              </a:rPr>
-              <a:t>Colony Design &amp; Ethics</a:t>
-            </a:r>
-            <a:endParaRPr lang="en-US" sz="3200" dirty="0"/>
-          </a:p>
-        </p:txBody>
-      </p:sp>
-      <p:sp>
-        <p:nvSpPr>
-          <p:cNvPr id="5" name="Shape 3"/>
-          <p:cNvSpPr/>
-          <p:nvPr/>
-        </p:nvSpPr>
-        <p:spPr>
-          <a:xfrm>
-            <a:off x="731520" y="3200400"/>
-            <a:ext cx="1828800" cy="54864"/>
-          </a:xfrm>
-          <a:prstGeom prst="rect">
-            <a:avLst/>
-          </a:prstGeom>
-          <a:solidFill>
-            <a:srgbClr val="E9C46A"/>
-          </a:solidFill>
-          <a:ln/>
-        </p:spPr>
-      </p:sp>
-    </p:spTree>
-  </p:cSld>
-  <p:clrMapOvr>
-    <a:masterClrMapping/>
-  </p:clrMapOvr>
-</p:sld>
-</file>
-
-<file path=ppt/slides/slide7.xml><?xml version="1.0" encoding="utf-8"?>
-<p:sld xmlns:a="http://schemas.openxmlformats.org/drawingml/2006/main" xmlns:r="http://schemas.openxmlformats.org/officeDocument/2006/relationships" xmlns:p="http://schemas.openxmlformats.org/presentationml/2006/main">
-  <p:cSld name="Slide 7">
-    <p:bg>
-      <p:bgPr>
-        <a:solidFill>
-          <a:srgbClr val="FAF8F5"/>
-        </a:solidFill>
-      </p:bgPr>
-    </p:bg>
-    <p:spTree>
-      <p:nvGrpSpPr>
-        <p:cNvPr id="1" name=""/>
-        <p:cNvGrpSpPr/>
-        <p:nvPr/>
-      </p:nvGrpSpPr>
-      <p:grpSpPr>
-        <a:xfrm>
-          <a:off x="0" y="0"/>
-          <a:ext cx="0" cy="0"/>
-          <a:chOff x="0" y="0"/>
-          <a:chExt cx="0" cy="0"/>
-        </a:xfrm>
-      </p:grpSpPr>
-      <p:sp>
-        <p:nvSpPr>
-          <p:cNvPr id="2" name="Shape 0"/>
-          <p:cNvSpPr/>
-          <p:nvPr/>
-        </p:nvSpPr>
-        <p:spPr>
-          <a:xfrm>
-            <a:off x="0" y="0"/>
-            <a:ext cx="9144000" cy="822960"/>
-          </a:xfrm>
-          <a:prstGeom prst="rect">
-            <a:avLst/>
-          </a:prstGeom>
-          <a:solidFill>
-            <a:srgbClr val="FFFFFF"/>
-          </a:solidFill>
-          <a:ln/>
-        </p:spPr>
-      </p:sp>
-      <p:sp>
-        <p:nvSpPr>
-          <p:cNvPr id="3" name="Shape 1"/>
-          <p:cNvSpPr/>
-          <p:nvPr/>
-        </p:nvSpPr>
-        <p:spPr>
-          <a:xfrm>
-            <a:off x="0" y="795528"/>
-            <a:ext cx="9144000" cy="27432"/>
-          </a:xfrm>
-          <a:prstGeom prst="rect">
-            <a:avLst/>
-          </a:prstGeom>
-          <a:solidFill>
-            <a:srgbClr val="E9C46A"/>
-          </a:solidFill>
-          <a:ln/>
-        </p:spPr>
-      </p:sp>
-      <p:sp>
-        <p:nvSpPr>
-          <p:cNvPr id="4" name="Text 2"/>
-          <p:cNvSpPr/>
-          <p:nvPr/>
-        </p:nvSpPr>
-        <p:spPr>
-          <a:xfrm>
-            <a:off x="640080" y="91440"/>
-            <a:ext cx="7863840" cy="640080"/>
-          </a:xfrm>
-          <a:prstGeom prst="rect">
-            <a:avLst/>
-          </a:prstGeom>
-          <a:noFill/>
-          <a:ln/>
-        </p:spPr>
-        <p:txBody>
-          <a:bodyPr wrap="square" lIns="0" tIns="0" rIns="0" bIns="0" rtlCol="0" anchor="ctr"/>
-          <a:lstStyle/>
-          <a:p>
-            <a:pPr indent="0" marL="0">
-              <a:buNone/>
-            </a:pPr>
-            <a:r>
-              <a:rPr lang="en-US" sz="2200" b="1" dirty="0">
-                <a:solidFill>
-                  <a:srgbClr val="1B2A4A"/>
-                </a:solidFill>
-                <a:latin typeface="Georgia" pitchFamily="34" charset="0"/>
-                <a:ea typeface="Georgia" pitchFamily="34" charset="-122"/>
-                <a:cs typeface="Georgia" pitchFamily="34" charset="-120"/>
-              </a:rPr>
-              <a:t>Colony &amp; Ethics Recap</a:t>
-            </a:r>
-            <a:endParaRPr lang="en-US" sz="2200" dirty="0"/>
+              <a:t>Keep Practising!</a:t>
+            </a:r>
+            <a:endParaRPr lang="en-US" sz="3600" dirty="0"/>
           </a:p>
         </p:txBody>
       </p:sp>
@@ -2713,200 +3820,47 @@
         </p:nvSpPr>
         <p:spPr>
           <a:xfrm>
-            <a:off x="640080" y="1005840"/>
-            <a:ext cx="7863840" cy="2926080"/>
-          </a:xfrm>
-          <a:prstGeom prst="rect">
-            <a:avLst/>
-          </a:prstGeom>
-          <a:noFill/>
-          <a:ln/>
-        </p:spPr>
-        <p:txBody>
-          <a:bodyPr wrap="square" rtlCol="0" anchor="ctr"/>
-          <a:lstStyle/>
-          <a:p>
-            <a:pPr marL="342900" indent="-342900">
-              <a:spcAft>
-                <a:spcPts val="800"/>
-              </a:spcAft>
-              <a:buSzPct val="100000"/>
-              <a:buChar char="•"/>
+            <a:off x="0" y="3017520"/>
+            <a:ext cx="12188952" cy="548640"/>
+          </a:xfrm>
+          <a:prstGeom prst="rect">
+            <a:avLst/>
+          </a:prstGeom>
+          <a:noFill/>
+          <a:ln/>
+        </p:spPr>
+        <p:txBody>
+          <a:bodyPr wrap="square" rtlCol="0" anchor="ctr"/>
+          <a:lstStyle/>
+          <a:p>
+            <a:pPr algn="ctr" indent="0" marL="0">
+              <a:buNone/>
             </a:pPr>
             <a:r>
               <a:rPr lang="en-US" sz="1600" dirty="0">
                 <a:solidFill>
-                  <a:srgbClr val="3D3A36"/>
-                </a:solidFill>
-                <a:latin typeface="Calibri" pitchFamily="34" charset="0"/>
-                <a:ea typeface="Calibri" pitchFamily="34" charset="-122"/>
-                <a:cs typeface="Calibri" pitchFamily="34" charset="-120"/>
-              </a:rPr>
-              <a:t>Habitat: pressurised, radiation-shielded, modular.</a:t>
+                  <a:srgbClr val="E9C46A"/>
+                </a:solidFill>
+                <a:latin typeface="Arial" pitchFamily="34" charset="0"/>
+                <a:ea typeface="Arial" pitchFamily="34" charset="-122"/>
+                <a:cs typeface="Arial" pitchFamily="34" charset="-120"/>
+              </a:rPr>
+              <a:t>Use the Self-Quiz and Review Games on mrzocchi.com</a:t>
             </a:r>
             <a:endParaRPr lang="en-US" sz="1600" dirty="0"/>
           </a:p>
-          <a:p>
-            <a:pPr marL="342900" indent="-342900">
-              <a:spcAft>
-                <a:spcPts val="800"/>
-              </a:spcAft>
-              <a:buSzPct val="100000"/>
-              <a:buChar char="•"/>
-            </a:pPr>
-            <a:r>
-              <a:rPr lang="en-US" sz="1600" dirty="0">
-                <a:solidFill>
-                  <a:srgbClr val="3D3A36"/>
-                </a:solidFill>
-                <a:latin typeface="Calibri" pitchFamily="34" charset="0"/>
-                <a:ea typeface="Calibri" pitchFamily="34" charset="-122"/>
-                <a:cs typeface="Calibri" pitchFamily="34" charset="-120"/>
-              </a:rPr>
-              <a:t>Food: hydroponics, insect farming, spirulina. Water: ice extraction + recycling.</a:t>
-            </a:r>
-            <a:endParaRPr lang="en-US" sz="1600" dirty="0"/>
-          </a:p>
-          <a:p>
-            <a:pPr marL="342900" indent="-342900">
-              <a:spcAft>
-                <a:spcPts val="800"/>
-              </a:spcAft>
-              <a:buSzPct val="100000"/>
-              <a:buChar char="•"/>
-            </a:pPr>
-            <a:r>
-              <a:rPr lang="en-US" sz="1600" dirty="0">
-                <a:solidFill>
-                  <a:srgbClr val="3D3A36"/>
-                </a:solidFill>
-                <a:latin typeface="Calibri" pitchFamily="34" charset="0"/>
-                <a:ea typeface="Calibri" pitchFamily="34" charset="-122"/>
-                <a:cs typeface="Calibri" pitchFamily="34" charset="-120"/>
-              </a:rPr>
-              <a:t>Energy: solar + nuclear redundancy.</a:t>
-            </a:r>
-            <a:endParaRPr lang="en-US" sz="1600" dirty="0"/>
-          </a:p>
-          <a:p>
-            <a:pPr marL="342900" indent="-342900">
-              <a:spcAft>
-                <a:spcPts val="800"/>
-              </a:spcAft>
-              <a:buSzPct val="100000"/>
-              <a:buChar char="•"/>
-            </a:pPr>
-            <a:r>
-              <a:rPr lang="en-US" sz="1600" dirty="0">
-                <a:solidFill>
-                  <a:srgbClr val="3D3A36"/>
-                </a:solidFill>
-                <a:latin typeface="Calibri" pitchFamily="34" charset="0"/>
-                <a:ea typeface="Calibri" pitchFamily="34" charset="-122"/>
-                <a:cs typeface="Calibri" pitchFamily="34" charset="-120"/>
-              </a:rPr>
-              <a:t>Ethics: planetary protection, ownership, inequality, terraforming.</a:t>
-            </a:r>
-            <a:endParaRPr lang="en-US" sz="1600" dirty="0"/>
-          </a:p>
-          <a:p>
-            <a:pPr marL="342900" indent="-342900">
-              <a:spcAft>
-                <a:spcPts val="800"/>
-              </a:spcAft>
-              <a:buSzPct val="100000"/>
-              <a:buChar char="•"/>
-            </a:pPr>
-            <a:r>
-              <a:rPr lang="en-US" sz="1600" dirty="0">
-                <a:solidFill>
-                  <a:srgbClr val="3D3A36"/>
-                </a:solidFill>
-                <a:latin typeface="Calibri" pitchFamily="34" charset="0"/>
-                <a:ea typeface="Calibri" pitchFamily="34" charset="-122"/>
-                <a:cs typeface="Calibri" pitchFamily="34" charset="-120"/>
-              </a:rPr>
-              <a:t>IDU: Science provides evidence. Humanities provides perspective.</a:t>
-            </a:r>
-            <a:endParaRPr lang="en-US" sz="1600" dirty="0"/>
-          </a:p>
-        </p:txBody>
-      </p:sp>
-    </p:spTree>
-  </p:cSld>
-  <p:clrMapOvr>
-    <a:masterClrMapping/>
-  </p:clrMapOvr>
-</p:sld>
-</file>
-
-<file path=ppt/slides/slide8.xml><?xml version="1.0" encoding="utf-8"?>
-<p:sld xmlns:a="http://schemas.openxmlformats.org/drawingml/2006/main" xmlns:r="http://schemas.openxmlformats.org/officeDocument/2006/relationships" xmlns:p="http://schemas.openxmlformats.org/presentationml/2006/main">
-  <p:cSld name="Slide 8">
-    <p:spTree>
-      <p:nvGrpSpPr>
-        <p:cNvPr id="1" name=""/>
-        <p:cNvGrpSpPr/>
-        <p:nvPr/>
-      </p:nvGrpSpPr>
-      <p:grpSpPr>
-        <a:xfrm>
-          <a:off x="0" y="0"/>
-          <a:ext cx="0" cy="0"/>
-          <a:chOff x="0" y="0"/>
-          <a:chExt cx="0" cy="0"/>
-        </a:xfrm>
-      </p:grpSpPr>
-      <p:sp>
-        <p:nvSpPr>
-          <p:cNvPr id="2" name="Shape 0"/>
-          <p:cNvSpPr/>
-          <p:nvPr/>
-        </p:nvSpPr>
-        <p:spPr>
-          <a:xfrm>
-            <a:off x="0" y="0"/>
-            <a:ext cx="9144000" cy="5143500"/>
-          </a:xfrm>
-          <a:prstGeom prst="rect">
-            <a:avLst/>
-          </a:prstGeom>
-          <a:solidFill>
-            <a:srgbClr val="1B2A4A"/>
-          </a:solidFill>
-          <a:ln/>
-        </p:spPr>
-      </p:sp>
-      <p:sp>
-        <p:nvSpPr>
-          <p:cNvPr id="3" name="Shape 1"/>
-          <p:cNvSpPr/>
-          <p:nvPr/>
-        </p:nvSpPr>
-        <p:spPr>
-          <a:xfrm>
-            <a:off x="0" y="4777740"/>
-            <a:ext cx="9144000" cy="365760"/>
-          </a:xfrm>
-          <a:prstGeom prst="rect">
-            <a:avLst/>
-          </a:prstGeom>
-          <a:solidFill>
-            <a:srgbClr val="E9C46A"/>
-          </a:solidFill>
-          <a:ln/>
-        </p:spPr>
-      </p:sp>
-      <p:sp>
-        <p:nvSpPr>
-          <p:cNvPr id="4" name="Text 2"/>
-          <p:cNvSpPr/>
-          <p:nvPr/>
-        </p:nvSpPr>
-        <p:spPr>
-          <a:xfrm>
-            <a:off x="731520" y="1371600"/>
-            <a:ext cx="7680960" cy="914400"/>
+        </p:txBody>
+      </p:sp>
+      <p:sp>
+        <p:nvSpPr>
+          <p:cNvPr id="6" name="Text 4"/>
+          <p:cNvSpPr/>
+          <p:nvPr/>
+        </p:nvSpPr>
+        <p:spPr>
+          <a:xfrm>
+            <a:off x="0" y="5029200"/>
+            <a:ext cx="12188952" cy="457200"/>
           </a:xfrm>
           <a:prstGeom prst="rect">
             <a:avLst/>
@@ -2922,56 +3876,17 @@
               <a:buNone/>
             </a:pPr>
             <a:r>
-              <a:rPr lang="en-US" sz="3600" b="1" dirty="0">
-                <a:solidFill>
-                  <a:srgbClr val="FFFFFF"/>
-                </a:solidFill>
-                <a:latin typeface="Georgia" pitchFamily="34" charset="0"/>
-                <a:ea typeface="Georgia" pitchFamily="34" charset="-122"/>
-                <a:cs typeface="Georgia" pitchFamily="34" charset="-120"/>
-              </a:rPr>
-              <a:t>Review &amp; Practise</a:t>
-            </a:r>
-            <a:endParaRPr lang="en-US" sz="3600" dirty="0"/>
-          </a:p>
-        </p:txBody>
-      </p:sp>
-      <p:sp>
-        <p:nvSpPr>
-          <p:cNvPr id="5" name="Text 3"/>
-          <p:cNvSpPr/>
-          <p:nvPr/>
-        </p:nvSpPr>
-        <p:spPr>
-          <a:xfrm>
-            <a:off x="731520" y="2560320"/>
-            <a:ext cx="7680960" cy="548640"/>
-          </a:xfrm>
-          <a:prstGeom prst="rect">
-            <a:avLst/>
-          </a:prstGeom>
-          <a:noFill/>
-          <a:ln/>
-        </p:spPr>
-        <p:txBody>
-          <a:bodyPr wrap="square" rtlCol="0" anchor="ctr"/>
-          <a:lstStyle/>
-          <a:p>
-            <a:pPr algn="ctr" indent="0" marL="0">
-              <a:buNone/>
-            </a:pPr>
-            <a:r>
-              <a:rPr lang="en-US" sz="2000" dirty="0">
-                <a:solidFill>
-                  <a:srgbClr val="E9C46A"/>
-                </a:solidFill>
-                <a:latin typeface="Calibri" pitchFamily="34" charset="0"/>
-                <a:ea typeface="Calibri" pitchFamily="34" charset="-122"/>
-                <a:cs typeface="Calibri" pitchFamily="34" charset="-120"/>
+              <a:rPr lang="en-US" sz="1400" dirty="0">
+                <a:solidFill>
+                  <a:srgbClr val="9B9690"/>
+                </a:solidFill>
+                <a:latin typeface="Arial" pitchFamily="34" charset="0"/>
+                <a:ea typeface="Arial" pitchFamily="34" charset="-122"/>
+                <a:cs typeface="Arial" pitchFamily="34" charset="-120"/>
               </a:rPr>
               <a:t>mrzocchi.com</a:t>
             </a:r>
-            <a:endParaRPr lang="en-US" sz="2000" dirty="0"/>
+            <a:endParaRPr lang="en-US" sz="1400" dirty="0"/>
           </a:p>
         </p:txBody>
       </p:sp>
